--- a/docs/submission/MediKiosk_SIH2026_Idea_PPT.pptx
+++ b/docs/submission/MediKiosk_SIH2026_Idea_PPT.pptx
@@ -5,14 +5,15 @@
     <p:sldMasterId id="2147483648" r:id="rId1"/>
   </p:sldMasterIdLst>
   <p:notesMasterIdLst>
-    <p:notesMasterId r:id="rId7"/>
+    <p:notesMasterId r:id="rId9"/>
   </p:notesMasterIdLst>
   <p:sldIdLst>
     <p:sldId id="291" r:id="rId2"/>
-    <p:sldId id="290" r:id="rId3"/>
-    <p:sldId id="293" r:id="rId4"/>
-    <p:sldId id="294" r:id="rId5"/>
-    <p:sldId id="296" r:id="rId6"/>
+    <p:sldId id="281" r:id="rId3"/>
+    <p:sldId id="290" r:id="rId4"/>
+    <p:sldId id="293" r:id="rId5"/>
+    <p:sldId id="294" r:id="rId6"/>
+    <p:sldId id="296" r:id="rId7"/>
   </p:sldIdLst>
   <p:sldSz cx="12192000" cy="6858000"/>
   <p:notesSz cx="6858000" cy="9144000"/>
@@ -161,19 +162,14 @@
 </file>
 
 <file path=ppt/charts/chart1.xml><?xml version="1.0" encoding="utf-8"?>
-<c:chartSpace xmlns:c="http://schemas.openxmlformats.org/drawingml/2006/chart" xmlns:a="http://schemas.openxmlformats.org/drawingml/2006/main" xmlns:r="http://schemas.openxmlformats.org/officeDocument/2006/relationships" xmlns:c16r2="http://schemas.microsoft.com/office/drawing/2015/06/chart">
+<c:chartSpace xmlns:c="http://schemas.openxmlformats.org/drawingml/2006/chart" xmlns:a="http://schemas.openxmlformats.org/drawingml/2006/main" xmlns:r="http://schemas.openxmlformats.org/officeDocument/2006/relationships">
   <c:date1904 val="0"/>
-  <c:lang val="en-US"/>
-  <c:roundedCorners val="1"/>
-  <c:style val="2"/>
   <c:chart>
     <c:autoTitleDeleted val="1"/>
     <c:plotArea>
-      <c:layout/>
       <c:barChart>
         <c:barDir val="bar"/>
         <c:grouping val="stacked"/>
-        <c:varyColors val="1"/>
         <c:ser>
           <c:idx val="0"/>
           <c:order val="0"/>
@@ -193,16 +189,8 @@
               <a:srgbClr val="2E9E5B"/>
             </a:solidFill>
           </c:spPr>
-          <c:invertIfNegative val="1"/>
           <c:dLbls>
             <c:numFmt formatCode="0;;;" sourceLinked="0"/>
-            <c:spPr>
-              <a:noFill/>
-              <a:ln>
-                <a:noFill/>
-              </a:ln>
-              <a:effectLst/>
-            </c:spPr>
             <c:txPr>
               <a:bodyPr/>
               <a:lstStyle/>
@@ -214,7 +202,6 @@
                     </a:solidFill>
                   </a:defRPr>
                 </a:pPr>
-                <a:endParaRPr lang="en-US"/>
               </a:p>
             </c:txPr>
             <c:dLblPos val="ctr"/>
@@ -224,12 +211,7 @@
             <c:showSerName val="0"/>
             <c:showPercent val="0"/>
             <c:showBubbleSize val="0"/>
-            <c:showLeaderLines val="0"/>
-            <c:extLst>
-              <c:ext xmlns:c15="http://schemas.microsoft.com/office/drawing/2012/chart" uri="{CE6537A1-D6FC-4f65-9D91-7224C49458BB}">
-                <c15:showLeaderLines val="0"/>
-              </c:ext>
-            </c:extLst>
+            <c:showLeaderLines val="1"/>
           </c:dLbls>
           <c:cat>
             <c:strRef>
@@ -278,20 +260,6 @@
               </c:numCache>
             </c:numRef>
           </c:val>
-          <c:extLst>
-            <c:ext xmlns:c14="http://schemas.microsoft.com/office/drawing/2007/8/2/chart" uri="{6F2FDCE9-48DA-4B69-8628-5D25D57E5C99}">
-              <c14:invertSolidFillFmt>
-                <c14:spPr xmlns:c14="http://schemas.microsoft.com/office/drawing/2007/8/2/chart">
-                  <a:solidFill>
-                    <a:srgbClr val="FFFFFF"/>
-                  </a:solidFill>
-                </c14:spPr>
-              </c14:invertSolidFillFmt>
-            </c:ext>
-            <c:ext xmlns:c16="http://schemas.microsoft.com/office/drawing/2014/chart" uri="{C3380CC4-5D6E-409C-BE32-E72D297353CC}">
-              <c16:uniqueId val="{00000000-8F58-4996-B2FA-39C49F39A2A1}"/>
-            </c:ext>
-          </c:extLst>
         </c:ser>
         <c:ser>
           <c:idx val="1"/>
@@ -312,16 +280,8 @@
               <a:srgbClr val="F2A93B"/>
             </a:solidFill>
           </c:spPr>
-          <c:invertIfNegative val="1"/>
           <c:dLbls>
             <c:numFmt formatCode="0;;;" sourceLinked="0"/>
-            <c:spPr>
-              <a:noFill/>
-              <a:ln>
-                <a:noFill/>
-              </a:ln>
-              <a:effectLst/>
-            </c:spPr>
             <c:txPr>
               <a:bodyPr/>
               <a:lstStyle/>
@@ -333,7 +293,6 @@
                     </a:solidFill>
                   </a:defRPr>
                 </a:pPr>
-                <a:endParaRPr lang="en-US"/>
               </a:p>
             </c:txPr>
             <c:dLblPos val="ctr"/>
@@ -343,12 +302,7 @@
             <c:showSerName val="0"/>
             <c:showPercent val="0"/>
             <c:showBubbleSize val="0"/>
-            <c:showLeaderLines val="0"/>
-            <c:extLst>
-              <c:ext xmlns:c15="http://schemas.microsoft.com/office/drawing/2012/chart" uri="{CE6537A1-D6FC-4f65-9D91-7224C49458BB}">
-                <c15:showLeaderLines val="0"/>
-              </c:ext>
-            </c:extLst>
+            <c:showLeaderLines val="1"/>
           </c:dLbls>
           <c:cat>
             <c:strRef>
@@ -397,20 +351,6 @@
               </c:numCache>
             </c:numRef>
           </c:val>
-          <c:extLst>
-            <c:ext xmlns:c14="http://schemas.microsoft.com/office/drawing/2007/8/2/chart" uri="{6F2FDCE9-48DA-4B69-8628-5D25D57E5C99}">
-              <c14:invertSolidFillFmt>
-                <c14:spPr xmlns:c14="http://schemas.microsoft.com/office/drawing/2007/8/2/chart">
-                  <a:solidFill>
-                    <a:srgbClr val="FFFFFF"/>
-                  </a:solidFill>
-                </c14:spPr>
-              </c14:invertSolidFillFmt>
-            </c:ext>
-            <c:ext xmlns:c16="http://schemas.microsoft.com/office/drawing/2014/chart" uri="{C3380CC4-5D6E-409C-BE32-E72D297353CC}">
-              <c16:uniqueId val="{00000001-8F58-4996-B2FA-39C49F39A2A1}"/>
-            </c:ext>
-          </c:extLst>
         </c:ser>
         <c:ser>
           <c:idx val="2"/>
@@ -431,16 +371,8 @@
               <a:srgbClr val="9FB0C3"/>
             </a:solidFill>
           </c:spPr>
-          <c:invertIfNegative val="1"/>
           <c:dLbls>
             <c:numFmt formatCode="0;;;" sourceLinked="0"/>
-            <c:spPr>
-              <a:noFill/>
-              <a:ln>
-                <a:noFill/>
-              </a:ln>
-              <a:effectLst/>
-            </c:spPr>
             <c:txPr>
               <a:bodyPr/>
               <a:lstStyle/>
@@ -452,7 +384,6 @@
                     </a:solidFill>
                   </a:defRPr>
                 </a:pPr>
-                <a:endParaRPr lang="en-US"/>
               </a:p>
             </c:txPr>
             <c:dLblPos val="ctr"/>
@@ -462,12 +393,7 @@
             <c:showSerName val="0"/>
             <c:showPercent val="0"/>
             <c:showBubbleSize val="0"/>
-            <c:showLeaderLines val="0"/>
-            <c:extLst>
-              <c:ext xmlns:c15="http://schemas.microsoft.com/office/drawing/2012/chart" uri="{CE6537A1-D6FC-4f65-9D91-7224C49458BB}">
-                <c15:showLeaderLines val="0"/>
-              </c:ext>
-            </c:extLst>
+            <c:showLeaderLines val="1"/>
           </c:dLbls>
           <c:cat>
             <c:strRef>
@@ -516,29 +442,7 @@
               </c:numCache>
             </c:numRef>
           </c:val>
-          <c:extLst>
-            <c:ext xmlns:c14="http://schemas.microsoft.com/office/drawing/2007/8/2/chart" uri="{6F2FDCE9-48DA-4B69-8628-5D25D57E5C99}">
-              <c14:invertSolidFillFmt>
-                <c14:spPr xmlns:c14="http://schemas.microsoft.com/office/drawing/2007/8/2/chart">
-                  <a:solidFill>
-                    <a:srgbClr val="FFFFFF"/>
-                  </a:solidFill>
-                </c14:spPr>
-              </c14:invertSolidFillFmt>
-            </c:ext>
-            <c:ext xmlns:c16="http://schemas.microsoft.com/office/drawing/2014/chart" uri="{C3380CC4-5D6E-409C-BE32-E72D297353CC}">
-              <c16:uniqueId val="{00000002-8F58-4996-B2FA-39C49F39A2A1}"/>
-            </c:ext>
-          </c:extLst>
         </c:ser>
-        <c:dLbls>
-          <c:showLegendKey val="0"/>
-          <c:showVal val="0"/>
-          <c:showCatName val="0"/>
-          <c:showSerName val="0"/>
-          <c:showPercent val="0"/>
-          <c:showBubbleSize val="0"/>
-        </c:dLbls>
         <c:gapWidth val="40"/>
         <c:overlap val="100"/>
         <c:axId val="-2068027336"/>
@@ -551,7 +455,6 @@
         </c:scaling>
         <c:delete val="0"/>
         <c:axPos val="l"/>
-        <c:numFmt formatCode="General" sourceLinked="0"/>
         <c:majorTickMark val="out"/>
         <c:minorTickMark val="none"/>
         <c:tickLblPos val="nextTo"/>
@@ -569,7 +472,6 @@
             <a:pPr>
               <a:defRPr sz="1000"/>
             </a:pPr>
-            <a:endParaRPr lang="en-US"/>
           </a:p>
         </c:txPr>
         <c:crossAx val="-2113994440"/>
@@ -582,18 +484,15 @@
       <c:valAx>
         <c:axId val="-2113994440"/>
         <c:scaling>
-          <c:orientation val="minMax"/>
-          <c:max val="6"/>
+          <c:max val="6.0"/>
         </c:scaling>
-        <c:delete val="1"/>
-        <c:axPos val="t"/>
-        <c:numFmt formatCode="General" sourceLinked="1"/>
+        <c:delete/>
+        <c:axPos val="b"/>
         <c:majorTickMark val="out"/>
         <c:minorTickMark val="none"/>
         <c:tickLblPos val="nextTo"/>
         <c:crossAx val="-2068027336"/>
         <c:crosses val="autoZero"/>
-        <c:crossBetween val="between"/>
       </c:valAx>
     </c:plotArea>
     <c:legend>
@@ -606,13 +505,10 @@
           <a:pPr>
             <a:defRPr sz="1000"/>
           </a:pPr>
-          <a:endParaRPr lang="en-US"/>
         </a:p>
       </c:txPr>
     </c:legend>
-    <c:plotVisOnly val="1"/>
     <c:dispBlanksAs val="gap"/>
-    <c:showDLblsOverMax val="1"/>
   </c:chart>
   <c:txPr>
     <a:bodyPr/>
@@ -633,19 +529,14 @@
 </file>
 
 <file path=ppt/charts/chart2.xml><?xml version="1.0" encoding="utf-8"?>
-<c:chartSpace xmlns:c="http://schemas.openxmlformats.org/drawingml/2006/chart" xmlns:a="http://schemas.openxmlformats.org/drawingml/2006/main" xmlns:r="http://schemas.openxmlformats.org/officeDocument/2006/relationships" xmlns:c16r2="http://schemas.microsoft.com/office/drawing/2015/06/chart">
+<c:chartSpace xmlns:c="http://schemas.openxmlformats.org/drawingml/2006/chart" xmlns:a="http://schemas.openxmlformats.org/drawingml/2006/main" xmlns:r="http://schemas.openxmlformats.org/officeDocument/2006/relationships">
   <c:date1904 val="0"/>
-  <c:lang val="en-US"/>
-  <c:roundedCorners val="1"/>
-  <c:style val="2"/>
   <c:chart>
     <c:autoTitleDeleted val="1"/>
     <c:plotArea>
-      <c:layout/>
       <c:barChart>
         <c:barDir val="col"/>
         <c:grouping val="clustered"/>
-        <c:varyColors val="1"/>
         <c:ser>
           <c:idx val="0"/>
           <c:order val="0"/>
@@ -665,15 +556,7 @@
               <a:srgbClr val="0070C0"/>
             </a:solidFill>
           </c:spPr>
-          <c:invertIfNegative val="1"/>
           <c:dLbls>
-            <c:spPr>
-              <a:noFill/>
-              <a:ln>
-                <a:noFill/>
-              </a:ln>
-              <a:effectLst/>
-            </c:spPr>
             <c:txPr>
               <a:bodyPr/>
               <a:lstStyle/>
@@ -681,7 +564,6 @@
                 <a:pPr>
                   <a:defRPr sz="1000" b="1"/>
                 </a:pPr>
-                <a:endParaRPr lang="en-US"/>
               </a:p>
             </c:txPr>
             <c:dLblPos val="outEnd"/>
@@ -691,12 +573,7 @@
             <c:showSerName val="0"/>
             <c:showPercent val="0"/>
             <c:showBubbleSize val="0"/>
-            <c:showLeaderLines val="0"/>
-            <c:extLst>
-              <c:ext xmlns:c15="http://schemas.microsoft.com/office/drawing/2012/chart" uri="{CE6537A1-D6FC-4f65-9D91-7224C49458BB}">
-                <c15:showLeaderLines val="0"/>
-              </c:ext>
-            </c:extLst>
+            <c:showLeaderLines val="1"/>
           </c:dLbls>
           <c:cat>
             <c:strRef>
@@ -733,20 +610,6 @@
               </c:numCache>
             </c:numRef>
           </c:val>
-          <c:extLst>
-            <c:ext xmlns:c14="http://schemas.microsoft.com/office/drawing/2007/8/2/chart" uri="{6F2FDCE9-48DA-4B69-8628-5D25D57E5C99}">
-              <c14:invertSolidFillFmt>
-                <c14:spPr xmlns:c14="http://schemas.microsoft.com/office/drawing/2007/8/2/chart">
-                  <a:solidFill>
-                    <a:srgbClr val="FFFFFF"/>
-                  </a:solidFill>
-                </c14:spPr>
-              </c14:invertSolidFillFmt>
-            </c:ext>
-            <c:ext xmlns:c16="http://schemas.microsoft.com/office/drawing/2014/chart" uri="{C3380CC4-5D6E-409C-BE32-E72D297353CC}">
-              <c16:uniqueId val="{00000000-1CD6-4888-A7A5-C344833FE97F}"/>
-            </c:ext>
-          </c:extLst>
         </c:ser>
         <c:ser>
           <c:idx val="1"/>
@@ -767,15 +630,7 @@
               <a:srgbClr val="E8802A"/>
             </a:solidFill>
           </c:spPr>
-          <c:invertIfNegative val="1"/>
           <c:dLbls>
-            <c:spPr>
-              <a:noFill/>
-              <a:ln>
-                <a:noFill/>
-              </a:ln>
-              <a:effectLst/>
-            </c:spPr>
             <c:txPr>
               <a:bodyPr/>
               <a:lstStyle/>
@@ -783,7 +638,6 @@
                 <a:pPr>
                   <a:defRPr sz="1000" b="1"/>
                 </a:pPr>
-                <a:endParaRPr lang="en-US"/>
               </a:p>
             </c:txPr>
             <c:dLblPos val="outEnd"/>
@@ -793,12 +647,7 @@
             <c:showSerName val="0"/>
             <c:showPercent val="0"/>
             <c:showBubbleSize val="0"/>
-            <c:showLeaderLines val="0"/>
-            <c:extLst>
-              <c:ext xmlns:c15="http://schemas.microsoft.com/office/drawing/2012/chart" uri="{CE6537A1-D6FC-4f65-9D91-7224C49458BB}">
-                <c15:showLeaderLines val="0"/>
-              </c:ext>
-            </c:extLst>
+            <c:showLeaderLines val="1"/>
           </c:dLbls>
           <c:cat>
             <c:strRef>
@@ -835,29 +684,7 @@
               </c:numCache>
             </c:numRef>
           </c:val>
-          <c:extLst>
-            <c:ext xmlns:c14="http://schemas.microsoft.com/office/drawing/2007/8/2/chart" uri="{6F2FDCE9-48DA-4B69-8628-5D25D57E5C99}">
-              <c14:invertSolidFillFmt>
-                <c14:spPr xmlns:c14="http://schemas.microsoft.com/office/drawing/2007/8/2/chart">
-                  <a:solidFill>
-                    <a:srgbClr val="FFFFFF"/>
-                  </a:solidFill>
-                </c14:spPr>
-              </c14:invertSolidFillFmt>
-            </c:ext>
-            <c:ext xmlns:c16="http://schemas.microsoft.com/office/drawing/2014/chart" uri="{C3380CC4-5D6E-409C-BE32-E72D297353CC}">
-              <c16:uniqueId val="{00000001-1CD6-4888-A7A5-C344833FE97F}"/>
-            </c:ext>
-          </c:extLst>
         </c:ser>
-        <c:dLbls>
-          <c:showLegendKey val="0"/>
-          <c:showVal val="0"/>
-          <c:showCatName val="0"/>
-          <c:showSerName val="0"/>
-          <c:showPercent val="0"/>
-          <c:showBubbleSize val="0"/>
-        </c:dLbls>
         <c:gapWidth val="55"/>
         <c:overlap val="-5"/>
         <c:axId val="-2068027336"/>
@@ -870,7 +697,6 @@
         </c:scaling>
         <c:delete val="0"/>
         <c:axPos val="b"/>
-        <c:numFmt formatCode="General" sourceLinked="0"/>
         <c:majorTickMark val="out"/>
         <c:minorTickMark val="none"/>
         <c:tickLblPos val="nextTo"/>
@@ -888,7 +714,6 @@
             <a:pPr>
               <a:defRPr sz="1000"/>
             </a:pPr>
-            <a:endParaRPr lang="en-US"/>
           </a:p>
         </c:txPr>
         <c:crossAx val="-2113994440"/>
@@ -901,18 +726,15 @@
       <c:valAx>
         <c:axId val="-2113994440"/>
         <c:scaling>
-          <c:orientation val="minMax"/>
-          <c:max val="400"/>
+          <c:max val="400.0"/>
         </c:scaling>
-        <c:delete val="1"/>
+        <c:delete/>
         <c:axPos val="l"/>
-        <c:numFmt formatCode="General" sourceLinked="1"/>
         <c:majorTickMark val="out"/>
         <c:minorTickMark val="none"/>
         <c:tickLblPos val="nextTo"/>
         <c:crossAx val="-2068027336"/>
         <c:crosses val="autoZero"/>
-        <c:crossBetween val="between"/>
       </c:valAx>
     </c:plotArea>
     <c:legend>
@@ -925,13 +747,10 @@
           <a:pPr>
             <a:defRPr sz="1000"/>
           </a:pPr>
-          <a:endParaRPr lang="en-US"/>
         </a:p>
       </c:txPr>
     </c:legend>
-    <c:plotVisOnly val="1"/>
     <c:dispBlanksAs val="gap"/>
-    <c:showDLblsOverMax val="1"/>
   </c:chart>
   <c:txPr>
     <a:bodyPr/>
@@ -1388,7 +1207,7 @@
       </p:grpSpPr>
       <p:sp>
         <p:nvSpPr>
-          <p:cNvPr id="18433" name="Slide Image Placeholder 1"/>
+          <p:cNvPr id="16385" name="Slide Image Placeholder 1"/>
           <p:cNvSpPr>
             <a:spLocks noGrp="1" noRot="1" noChangeAspect="1"/>
           </p:cNvSpPr>
@@ -1414,7 +1233,7 @@
       </p:sp>
       <p:sp>
         <p:nvSpPr>
-          <p:cNvPr id="18434" name="Notes Placeholder 2"/>
+          <p:cNvPr id="16386" name="Notes Placeholder 2"/>
           <p:cNvSpPr>
             <a:spLocks noGrp="1"/>
           </p:cNvSpPr>
@@ -1446,7 +1265,7 @@
       </p:sp>
       <p:sp>
         <p:nvSpPr>
-          <p:cNvPr id="18435" name="Slide Number Placeholder 3"/>
+          <p:cNvPr id="16387" name="Slide Number Placeholder 3"/>
           <p:cNvSpPr>
             <a:spLocks noGrp="1"/>
           </p:cNvSpPr>
@@ -1466,7 +1285,7 @@
           <a:bodyPr/>
           <a:lstStyle/>
           <a:p>
-            <a:fld id="{0CA7B74D-3791-4AC6-8451-F10DBCCCDD9A}" type="slidenum">
+            <a:fld id="{65F62A7E-A2F8-438F-9CF8-47DE63F471B4}" type="slidenum">
               <a:rPr lang="en-US"/>
               <a:pPr/>
               <a:t>2</a:t>
@@ -1478,7 +1297,7 @@
     </p:spTree>
     <p:extLst>
       <p:ext uri="{BB962C8B-B14F-4D97-AF65-F5344CB8AC3E}">
-        <p14:creationId xmlns:p14="http://schemas.microsoft.com/office/powerpoint/2010/main" val="2335206292"/>
+        <p14:creationId xmlns:p14="http://schemas.microsoft.com/office/powerpoint/2010/main" val="2904073229"/>
       </p:ext>
     </p:extLst>
   </p:cSld>
@@ -1585,78 +1404,19 @@
           <a:bodyPr/>
           <a:lstStyle/>
           <a:p>
-            <a:pPr marL="0" marR="0" lvl="0" indent="0" algn="r" defTabSz="457200" rtl="0" eaLnBrk="1" fontAlgn="base" latinLnBrk="0" hangingPunct="1">
-              <a:lnSpc>
-                <a:spcPct val="100000"/>
-              </a:lnSpc>
-              <a:spcBef>
-                <a:spcPct val="0"/>
-              </a:spcBef>
-              <a:spcAft>
-                <a:spcPct val="0"/>
-              </a:spcAft>
-              <a:buClrTx/>
-              <a:buSzTx/>
-              <a:buFontTx/>
-              <a:buNone/>
-              <a:tabLst/>
-              <a:defRPr/>
-            </a:pPr>
             <a:fld id="{0CA7B74D-3791-4AC6-8451-F10DBCCCDD9A}" type="slidenum">
-              <a:rPr kumimoji="0" lang="en-US" sz="1200" b="0" i="0" u="none" strike="noStrike" kern="1200" cap="none" spc="0" normalizeH="0" baseline="0" noProof="0">
-                <a:ln>
-                  <a:noFill/>
-                </a:ln>
-                <a:solidFill>
-                  <a:prstClr val="black"/>
-                </a:solidFill>
-                <a:effectLst/>
-                <a:uLnTx/>
-                <a:uFillTx/>
-                <a:latin typeface="Calibri" pitchFamily="34" charset="0"/>
-                <a:ea typeface="ＭＳ Ｐゴシック" pitchFamily="1" charset="-128"/>
-                <a:cs typeface="+mn-cs"/>
-              </a:rPr>
-              <a:pPr marL="0" marR="0" lvl="0" indent="0" algn="r" defTabSz="457200" rtl="0" eaLnBrk="1" fontAlgn="base" latinLnBrk="0" hangingPunct="1">
-                <a:lnSpc>
-                  <a:spcPct val="100000"/>
-                </a:lnSpc>
-                <a:spcBef>
-                  <a:spcPct val="0"/>
-                </a:spcBef>
-                <a:spcAft>
-                  <a:spcPct val="0"/>
-                </a:spcAft>
-                <a:buClrTx/>
-                <a:buSzTx/>
-                <a:buFontTx/>
-                <a:buNone/>
-                <a:tabLst/>
-                <a:defRPr/>
-              </a:pPr>
+              <a:rPr lang="en-US"/>
+              <a:pPr/>
               <a:t>3</a:t>
             </a:fld>
-            <a:endParaRPr kumimoji="0" lang="en-US" sz="1200" b="0" i="0" u="none" strike="noStrike" kern="1200" cap="none" spc="0" normalizeH="0" baseline="0" noProof="0">
-              <a:ln>
-                <a:noFill/>
-              </a:ln>
-              <a:solidFill>
-                <a:prstClr val="black"/>
-              </a:solidFill>
-              <a:effectLst/>
-              <a:uLnTx/>
-              <a:uFillTx/>
-              <a:latin typeface="Calibri" pitchFamily="34" charset="0"/>
-              <a:ea typeface="ＭＳ Ｐゴシック" pitchFamily="1" charset="-128"/>
-              <a:cs typeface="+mn-cs"/>
-            </a:endParaRPr>
+            <a:endParaRPr lang="en-US"/>
           </a:p>
         </p:txBody>
       </p:sp>
     </p:spTree>
     <p:extLst>
       <p:ext uri="{BB962C8B-B14F-4D97-AF65-F5344CB8AC3E}">
-        <p14:creationId xmlns:p14="http://schemas.microsoft.com/office/powerpoint/2010/main" val="3773505461"/>
+        <p14:creationId xmlns:p14="http://schemas.microsoft.com/office/powerpoint/2010/main" val="2335206292"/>
       </p:ext>
     </p:extLst>
   </p:cSld>
@@ -1834,7 +1594,7 @@
     </p:spTree>
     <p:extLst>
       <p:ext uri="{BB962C8B-B14F-4D97-AF65-F5344CB8AC3E}">
-        <p14:creationId xmlns:p14="http://schemas.microsoft.com/office/powerpoint/2010/main" val="2641722845"/>
+        <p14:creationId xmlns:p14="http://schemas.microsoft.com/office/powerpoint/2010/main" val="3773505461"/>
       </p:ext>
     </p:extLst>
   </p:cSld>
@@ -1991,6 +1751,184 @@
                 <a:defRPr/>
               </a:pPr>
               <a:t>5</a:t>
+            </a:fld>
+            <a:endParaRPr kumimoji="0" lang="en-US" sz="1200" b="0" i="0" u="none" strike="noStrike" kern="1200" cap="none" spc="0" normalizeH="0" baseline="0" noProof="0">
+              <a:ln>
+                <a:noFill/>
+              </a:ln>
+              <a:solidFill>
+                <a:prstClr val="black"/>
+              </a:solidFill>
+              <a:effectLst/>
+              <a:uLnTx/>
+              <a:uFillTx/>
+              <a:latin typeface="Calibri" pitchFamily="34" charset="0"/>
+              <a:ea typeface="ＭＳ Ｐゴシック" pitchFamily="1" charset="-128"/>
+              <a:cs typeface="+mn-cs"/>
+            </a:endParaRPr>
+          </a:p>
+        </p:txBody>
+      </p:sp>
+    </p:spTree>
+    <p:extLst>
+      <p:ext uri="{BB962C8B-B14F-4D97-AF65-F5344CB8AC3E}">
+        <p14:creationId xmlns:p14="http://schemas.microsoft.com/office/powerpoint/2010/main" val="2641722845"/>
+      </p:ext>
+    </p:extLst>
+  </p:cSld>
+  <p:clrMapOvr>
+    <a:masterClrMapping/>
+  </p:clrMapOvr>
+</p:notes>
+</file>
+
+<file path=ppt/notesSlides/notesSlide5.xml><?xml version="1.0" encoding="utf-8"?>
+<p:notes xmlns:a="http://schemas.openxmlformats.org/drawingml/2006/main" xmlns:r="http://schemas.openxmlformats.org/officeDocument/2006/relationships" xmlns:p="http://schemas.openxmlformats.org/presentationml/2006/main">
+  <p:cSld>
+    <p:spTree>
+      <p:nvGrpSpPr>
+        <p:cNvPr id="1" name=""/>
+        <p:cNvGrpSpPr/>
+        <p:nvPr/>
+      </p:nvGrpSpPr>
+      <p:grpSpPr>
+        <a:xfrm>
+          <a:off x="0" y="0"/>
+          <a:ext cx="0" cy="0"/>
+          <a:chOff x="0" y="0"/>
+          <a:chExt cx="0" cy="0"/>
+        </a:xfrm>
+      </p:grpSpPr>
+      <p:sp>
+        <p:nvSpPr>
+          <p:cNvPr id="18433" name="Slide Image Placeholder 1"/>
+          <p:cNvSpPr>
+            <a:spLocks noGrp="1" noRot="1" noChangeAspect="1"/>
+          </p:cNvSpPr>
+          <p:nvPr>
+            <p:ph type="sldImg"/>
+          </p:nvPr>
+        </p:nvSpPr>
+        <p:spPr bwMode="auto">
+          <a:xfrm>
+            <a:off x="381000" y="685800"/>
+            <a:ext cx="6096000" cy="3429000"/>
+          </a:xfrm>
+          <a:noFill/>
+          <a:ln>
+            <a:solidFill>
+              <a:srgbClr val="000000"/>
+            </a:solidFill>
+            <a:miter lim="800000"/>
+            <a:headEnd/>
+            <a:tailEnd/>
+          </a:ln>
+        </p:spPr>
+      </p:sp>
+      <p:sp>
+        <p:nvSpPr>
+          <p:cNvPr id="18434" name="Notes Placeholder 2"/>
+          <p:cNvSpPr>
+            <a:spLocks noGrp="1"/>
+          </p:cNvSpPr>
+          <p:nvPr>
+            <p:ph type="body" idx="1"/>
+          </p:nvPr>
+        </p:nvSpPr>
+        <p:spPr bwMode="auto">
+          <a:noFill/>
+        </p:spPr>
+        <p:txBody>
+          <a:bodyPr wrap="square" numCol="1" anchor="t" anchorCtr="0" compatLnSpc="1">
+            <a:prstTxWarp prst="textNoShape">
+              <a:avLst/>
+            </a:prstTxWarp>
+          </a:bodyPr>
+          <a:lstStyle/>
+          <a:p>
+            <a:pPr eaLnBrk="1" hangingPunct="1">
+              <a:spcBef>
+                <a:spcPct val="0"/>
+              </a:spcBef>
+            </a:pPr>
+            <a:endParaRPr lang="en-US">
+              <a:ea typeface="ＭＳ Ｐゴシック" pitchFamily="1" charset="-128"/>
+            </a:endParaRPr>
+          </a:p>
+        </p:txBody>
+      </p:sp>
+      <p:sp>
+        <p:nvSpPr>
+          <p:cNvPr id="18435" name="Slide Number Placeholder 3"/>
+          <p:cNvSpPr>
+            <a:spLocks noGrp="1"/>
+          </p:cNvSpPr>
+          <p:nvPr>
+            <p:ph type="sldNum" sz="quarter" idx="5"/>
+          </p:nvPr>
+        </p:nvSpPr>
+        <p:spPr bwMode="auto">
+          <a:noFill/>
+          <a:ln>
+            <a:miter lim="800000"/>
+            <a:headEnd/>
+            <a:tailEnd/>
+          </a:ln>
+        </p:spPr>
+        <p:txBody>
+          <a:bodyPr/>
+          <a:lstStyle/>
+          <a:p>
+            <a:pPr marL="0" marR="0" lvl="0" indent="0" algn="r" defTabSz="457200" rtl="0" eaLnBrk="1" fontAlgn="base" latinLnBrk="0" hangingPunct="1">
+              <a:lnSpc>
+                <a:spcPct val="100000"/>
+              </a:lnSpc>
+              <a:spcBef>
+                <a:spcPct val="0"/>
+              </a:spcBef>
+              <a:spcAft>
+                <a:spcPct val="0"/>
+              </a:spcAft>
+              <a:buClrTx/>
+              <a:buSzTx/>
+              <a:buFontTx/>
+              <a:buNone/>
+              <a:tabLst/>
+              <a:defRPr/>
+            </a:pPr>
+            <a:fld id="{0CA7B74D-3791-4AC6-8451-F10DBCCCDD9A}" type="slidenum">
+              <a:rPr kumimoji="0" lang="en-US" sz="1200" b="0" i="0" u="none" strike="noStrike" kern="1200" cap="none" spc="0" normalizeH="0" baseline="0" noProof="0">
+                <a:ln>
+                  <a:noFill/>
+                </a:ln>
+                <a:solidFill>
+                  <a:prstClr val="black"/>
+                </a:solidFill>
+                <a:effectLst/>
+                <a:uLnTx/>
+                <a:uFillTx/>
+                <a:latin typeface="Calibri" pitchFamily="34" charset="0"/>
+                <a:ea typeface="ＭＳ Ｐゴシック" pitchFamily="1" charset="-128"/>
+                <a:cs typeface="+mn-cs"/>
+              </a:rPr>
+              <a:pPr marL="0" marR="0" lvl="0" indent="0" algn="r" defTabSz="457200" rtl="0" eaLnBrk="1" fontAlgn="base" latinLnBrk="0" hangingPunct="1">
+                <a:lnSpc>
+                  <a:spcPct val="100000"/>
+                </a:lnSpc>
+                <a:spcBef>
+                  <a:spcPct val="0"/>
+                </a:spcBef>
+                <a:spcAft>
+                  <a:spcPct val="0"/>
+                </a:spcAft>
+                <a:buClrTx/>
+                <a:buSzTx/>
+                <a:buFontTx/>
+                <a:buNone/>
+                <a:tabLst/>
+                <a:defRPr/>
+              </a:pPr>
+              <a:t>6</a:t>
             </a:fld>
             <a:endParaRPr kumimoji="0" lang="en-US" sz="1200" b="0" i="0" u="none" strike="noStrike" kern="1200" cap="none" spc="0" normalizeH="0" baseline="0" noProof="0">
               <a:ln>
@@ -6295,7 +6233,7 @@
         <p:spPr>
           <a:xfrm>
             <a:off x="331286" y="2076450"/>
-            <a:ext cx="6583680" cy="3855607"/>
+            <a:ext cx="6583680" cy="4703019"/>
           </a:xfrm>
           <a:prstGeom prst="rect">
             <a:avLst/>
@@ -6326,7 +6264,7 @@
               <a:t>Problem Statement ID – </a:t>
             </a:r>
             <a:r>
-              <a:rPr sz="2000" b="0" dirty="0">
+              <a:rPr sz="2000" b="0">
                 <a:solidFill>
                   <a:srgbClr val="1F497D"/>
                 </a:solidFill>
@@ -6351,7 +6289,7 @@
               <a:t>Problem Statement Title – </a:t>
             </a:r>
             <a:r>
-              <a:rPr sz="2000" b="0" dirty="0">
+              <a:rPr sz="2000" b="0">
                 <a:solidFill>
                   <a:srgbClr val="1F497D"/>
                 </a:solidFill>
@@ -6376,31 +6314,13 @@
               <a:t>Theme – </a:t>
             </a:r>
             <a:r>
-              <a:rPr sz="2000" b="0" dirty="0">
+              <a:rPr sz="2000" b="0">
                 <a:solidFill>
                   <a:srgbClr val="1F497D"/>
                 </a:solidFill>
                 <a:latin typeface="Arial"/>
               </a:rPr>
-              <a:t>MedTech / </a:t>
-            </a:r>
-            <a:r>
-              <a:rPr sz="2000" b="0" dirty="0" err="1">
-                <a:solidFill>
-                  <a:srgbClr val="1F497D"/>
-                </a:solidFill>
-                <a:latin typeface="Arial"/>
-              </a:rPr>
-              <a:t>BioTech</a:t>
-            </a:r>
-            <a:r>
-              <a:rPr sz="2000" b="0" dirty="0">
-                <a:solidFill>
-                  <a:srgbClr val="1F497D"/>
-                </a:solidFill>
-                <a:latin typeface="Arial"/>
-              </a:rPr>
-              <a:t> / HealthTech</a:t>
+              <a:t>MedTech / BioTech / HealthTech</a:t>
             </a:r>
           </a:p>
           <a:p>
@@ -6419,7 +6339,7 @@
               <a:t>PS Category – </a:t>
             </a:r>
             <a:r>
-              <a:rPr sz="2000" b="0" dirty="0">
+              <a:rPr sz="2000" b="0">
                 <a:solidFill>
                   <a:srgbClr val="1F497D"/>
                 </a:solidFill>
@@ -6460,14 +6380,13 @@
               <a:t>Team Name – </a:t>
             </a:r>
             <a:r>
-              <a:rPr lang="en-US" sz="2000" dirty="0" err="1">
+              <a:rPr sz="2000" b="0">
                 <a:solidFill>
                   <a:srgbClr val="1F497D"/>
                 </a:solidFill>
                 <a:latin typeface="Arial"/>
-                <a:cs typeface="Arial" panose="020B0604020202020204" pitchFamily="34" charset="0"/>
-              </a:rPr>
-              <a:t>CodeBloom</a:t>
+              </a:rPr>
+              <a:t>TrishulX</a:t>
             </a:r>
             <a:endParaRPr lang="en-IN" sz="2400" b="1" dirty="0">
               <a:latin typeface="Arial" panose="020B0604020202020204" pitchFamily="34" charset="0"/>
@@ -6514,7 +6433,7 @@
         </p:nvSpPr>
         <p:spPr>
           <a:xfrm>
-            <a:off x="6096000" y="5266384"/>
+            <a:off x="5806440" y="5285232"/>
             <a:ext cx="4572000" cy="502920"/>
           </a:xfrm>
           <a:prstGeom prst="rect">
@@ -6523,14 +6442,14 @@
           <a:noFill/>
         </p:spPr>
         <p:txBody>
-          <a:bodyPr wrap="square" lIns="36576" tIns="18288" rIns="36576" bIns="18288" anchor="ctr">
+          <a:bodyPr wrap="square" lIns="36576" rIns="36576" tIns="18288" bIns="18288" anchor="ctr">
             <a:spAutoFit/>
           </a:bodyPr>
           <a:lstStyle/>
           <a:p>
             <a:pPr algn="ctr"/>
             <a:r>
-              <a:rPr sz="3000" b="1" i="0" dirty="0" err="1">
+              <a:rPr sz="3000" b="1" i="0">
                 <a:solidFill>
                   <a:srgbClr val="1F497D"/>
                 </a:solidFill>
@@ -6538,12 +6457,6 @@
               </a:rPr>
               <a:t>MediKiosk</a:t>
             </a:r>
-            <a:endParaRPr sz="3000" b="1" i="0" dirty="0">
-              <a:solidFill>
-                <a:srgbClr val="1F497D"/>
-              </a:solidFill>
-              <a:latin typeface="Arial"/>
-            </a:endParaRPr>
           </a:p>
         </p:txBody>
       </p:sp>
@@ -6555,7 +6468,7 @@
         </p:nvSpPr>
         <p:spPr>
           <a:xfrm>
-            <a:off x="6081190" y="5750736"/>
+            <a:off x="5806440" y="5760720"/>
             <a:ext cx="4572000" cy="274320"/>
           </a:xfrm>
           <a:prstGeom prst="rect">
@@ -6564,14 +6477,14 @@
           <a:noFill/>
         </p:spPr>
         <p:txBody>
-          <a:bodyPr wrap="square" lIns="36576" tIns="18288" rIns="36576" bIns="18288" anchor="t">
+          <a:bodyPr wrap="square" lIns="36576" rIns="36576" tIns="18288" bIns="18288" anchor="t">
             <a:spAutoFit/>
           </a:bodyPr>
           <a:lstStyle/>
           <a:p>
             <a:pPr algn="ctr"/>
             <a:r>
-              <a:rPr sz="1400" b="0" i="0" dirty="0">
+              <a:rPr sz="1400" b="0" i="0">
                 <a:solidFill>
                   <a:srgbClr val="595959"/>
                 </a:solidFill>
@@ -6609,13 +6522,7 @@
       </p:grpSpPr>
       <p:sp>
         <p:nvSpPr>
-          <p:cNvPr id="10" name="Rectangle 9">
-            <a:extLst>
-              <a:ext uri="{FF2B5EF4-FFF2-40B4-BE49-F238E27FC236}">
-                <a16:creationId xmlns:a16="http://schemas.microsoft.com/office/drawing/2014/main" id="{AD4F69D3-EEB0-4C4C-9434-B9960FB5854C}"/>
-              </a:ext>
-            </a:extLst>
-          </p:cNvPr>
+          <p:cNvPr id="9" name="Rectangle 8"/>
           <p:cNvSpPr>
             <a:spLocks noChangeArrowheads="1"/>
           </p:cNvSpPr>
@@ -6673,7 +6580,7 @@
       </p:sp>
       <p:sp>
         <p:nvSpPr>
-          <p:cNvPr id="17409" name="Title 1"/>
+          <p:cNvPr id="15361" name="Title 1"/>
           <p:cNvSpPr>
             <a:spLocks noGrp="1"/>
           </p:cNvSpPr>
@@ -6681,19 +6588,31 @@
             <p:ph type="title"/>
           </p:nvPr>
         </p:nvSpPr>
-        <p:spPr/>
+        <p:spPr>
+          <a:xfrm>
+            <a:off x="182998" y="0"/>
+            <a:ext cx="10972800" cy="1143000"/>
+          </a:xfrm>
+        </p:spPr>
         <p:txBody>
           <a:bodyPr/>
           <a:lstStyle/>
           <a:p>
             <a:pPr eaLnBrk="1" hangingPunct="1"/>
-            <a:r>
+            <a:br>
               <a:rPr lang="en-US" sz="3600" b="1" dirty="0">
                 <a:latin typeface="Times New Roman" panose="02020603050405020304" pitchFamily="18" charset="0"/>
                 <a:ea typeface="ＭＳ Ｐゴシック" pitchFamily="1" charset="-128"/>
                 <a:cs typeface="Times New Roman" panose="02020603050405020304" pitchFamily="18" charset="0"/>
               </a:rPr>
-              <a:t>TECHNICAL APPROACH</a:t>
+            </a:br>
+            <a:r>
+              <a:rPr lang="en-US" sz="3600" b="1" dirty="0">
+                <a:latin typeface="Times New Roman" panose="02020603050405020304" pitchFamily="18" charset="0"/>
+                <a:ea typeface="ＭＳ Ｐゴシック" pitchFamily="1" charset="-128"/>
+                <a:cs typeface="Times New Roman" panose="02020603050405020304" pitchFamily="18" charset="0"/>
+              </a:rPr>
+              <a:t>IDEA TITLE</a:t>
             </a:r>
           </a:p>
         </p:txBody>
@@ -6714,7 +6633,7 @@
           <a:lstStyle/>
           <a:p>
             <a:fld id="{677C3CE7-23F7-4828-823C-E0205DF2CF97}" type="slidenum">
-              <a:rPr lang="en-US" b="1">
+              <a:rPr lang="en-US" b="1" smtClean="0">
                 <a:solidFill>
                   <a:schemeClr val="bg1"/>
                 </a:solidFill>
@@ -6753,6 +6672,14 @@
             <a:pPr>
               <a:defRPr/>
             </a:pPr>
+            <a:r>
+              <a:rPr lang="en-US">
+                <a:solidFill>
+                  <a:schemeClr val="bg1"/>
+                </a:solidFill>
+              </a:rPr>
+              <a:t>@SIH Idea submission- Template</a:t>
+            </a:r>
             <a:endParaRPr lang="en-US" dirty="0">
               <a:solidFill>
                 <a:schemeClr val="bg1"/>
@@ -6763,7 +6690,7 @@
       </p:sp>
       <p:sp>
         <p:nvSpPr>
-          <p:cNvPr id="11" name="Oval 10" descr="Your startup LOGO">
+          <p:cNvPr id="10" name="Oval 9" descr="Your startup LOGO">
             <a:extLst>
               <a:ext uri="{FF2B5EF4-FFF2-40B4-BE49-F238E27FC236}">
                 <a16:creationId xmlns:a16="http://schemas.microsoft.com/office/drawing/2014/main" id="{5DBCE864-823D-4A13-9607-5DA1F0ED5FB8}"/>
@@ -6805,10 +6732,2106 @@
           <a:p>
             <a:pPr algn="ctr"/>
             <a:r>
-              <a:rPr lang="en-US" sz="1100" b="1" dirty="0" err="1"/>
-              <a:t>CodeBloom</a:t>
-            </a:r>
-            <a:endParaRPr lang="en-IN" sz="1100" b="1" dirty="0"/>
+              <a:rPr lang="en-US" dirty="0" sz="1500" b="1">
+                <a:solidFill>
+                  <a:srgbClr val="1F497D"/>
+                </a:solidFill>
+              </a:rPr>
+              <a:t>TrishulX</a:t>
+            </a:r>
+            <a:endParaRPr lang="en-IN" dirty="0"/>
+          </a:p>
+        </p:txBody>
+      </p:sp>
+      <p:pic>
+        <p:nvPicPr>
+          <p:cNvPr id="11" name="Picture 10"/>
+          <p:cNvPicPr>
+            <a:picLocks noChangeAspect="1"/>
+          </p:cNvPicPr>
+          <p:nvPr/>
+        </p:nvPicPr>
+        <p:blipFill>
+          <a:blip r:embed="rId3">
+            <a:extLst>
+              <a:ext uri="{28A0092B-C50C-407E-A947-70E740481C1C}">
+                <a14:useLocalDpi xmlns:a14="http://schemas.microsoft.com/office/drawing/2010/main" val="0"/>
+              </a:ext>
+            </a:extLst>
+          </a:blip>
+          <a:stretch>
+            <a:fillRect/>
+          </a:stretch>
+        </p:blipFill>
+        <p:spPr>
+          <a:xfrm>
+            <a:off x="9780086" y="1500"/>
+            <a:ext cx="2249850" cy="1062337"/>
+          </a:xfrm>
+          <a:prstGeom prst="rect">
+            <a:avLst/>
+          </a:prstGeom>
+        </p:spPr>
+      </p:pic>
+      <p:sp>
+        <p:nvSpPr>
+          <p:cNvPr id="15362" name="TextBox 15361"/>
+          <p:cNvSpPr txBox="1"/>
+          <p:nvPr/>
+        </p:nvSpPr>
+        <p:spPr>
+          <a:xfrm>
+            <a:off x="365760" y="1115568"/>
+            <a:ext cx="11430000" cy="438912"/>
+          </a:xfrm>
+          <a:prstGeom prst="rect">
+            <a:avLst/>
+          </a:prstGeom>
+          <a:noFill/>
+        </p:spPr>
+        <p:txBody>
+          <a:bodyPr wrap="square" lIns="36576" rIns="36576" tIns="18288" bIns="18288" anchor="ctr">
+            <a:spAutoFit/>
+          </a:bodyPr>
+          <a:lstStyle/>
+          <a:p>
+            <a:pPr algn="ctr"/>
+            <a:r>
+              <a:rPr sz="1700" b="1" i="0">
+                <a:solidFill>
+                  <a:srgbClr val="E8802A"/>
+                </a:solidFill>
+                <a:latin typeface="Arial"/>
+              </a:rPr>
+              <a:t>MediKiosk – AI Voice &amp; Touch Clinical History Kiosk with Medical Document OCR</a:t>
+            </a:r>
+          </a:p>
+        </p:txBody>
+      </p:sp>
+      <p:sp>
+        <p:nvSpPr>
+          <p:cNvPr id="15363" name="TextBox 15362"/>
+          <p:cNvSpPr txBox="1"/>
+          <p:nvPr/>
+        </p:nvSpPr>
+        <p:spPr>
+          <a:xfrm>
+            <a:off x="365760" y="1600200"/>
+            <a:ext cx="11430000" cy="329184"/>
+          </a:xfrm>
+          <a:prstGeom prst="rect">
+            <a:avLst/>
+          </a:prstGeom>
+          <a:noFill/>
+        </p:spPr>
+        <p:txBody>
+          <a:bodyPr wrap="square" lIns="36576" rIns="36576" tIns="18288" bIns="18288" anchor="ctr">
+            <a:spAutoFit/>
+          </a:bodyPr>
+          <a:lstStyle/>
+          <a:p>
+            <a:pPr algn="l"/>
+            <a:r>
+              <a:rPr sz="1600" b="0" i="0">
+                <a:solidFill>
+                  <a:srgbClr val="1F497D"/>
+                </a:solidFill>
+                <a:latin typeface="Arial"/>
+              </a:rPr>
+              <a:t>❖ </a:t>
+            </a:r>
+            <a:r>
+              <a:rPr sz="1600" b="1" i="0" u="sng">
+                <a:solidFill>
+                  <a:srgbClr val="1F497D"/>
+                </a:solidFill>
+                <a:latin typeface="Arial"/>
+              </a:rPr>
+              <a:t>Proposed Solution (Describe your Idea/Solution/Prototype)</a:t>
+            </a:r>
+          </a:p>
+        </p:txBody>
+      </p:sp>
+      <p:sp>
+        <p:nvSpPr>
+          <p:cNvPr id="15364" name="TextBox 15363"/>
+          <p:cNvSpPr txBox="1"/>
+          <p:nvPr/>
+        </p:nvSpPr>
+        <p:spPr>
+          <a:xfrm>
+            <a:off x="365760" y="1956816"/>
+            <a:ext cx="7315200" cy="274320"/>
+          </a:xfrm>
+          <a:prstGeom prst="rect">
+            <a:avLst/>
+          </a:prstGeom>
+          <a:noFill/>
+        </p:spPr>
+        <p:txBody>
+          <a:bodyPr wrap="square" lIns="36576" rIns="36576" tIns="18288" bIns="18288" anchor="ctr">
+            <a:spAutoFit/>
+          </a:bodyPr>
+          <a:lstStyle/>
+          <a:p>
+            <a:pPr algn="l"/>
+            <a:r>
+              <a:rPr sz="1000" b="0" i="0">
+                <a:solidFill>
+                  <a:srgbClr val="E8802A"/>
+                </a:solidFill>
+                <a:latin typeface="Arial"/>
+              </a:rPr>
+              <a:t>■ </a:t>
+            </a:r>
+            <a:r>
+              <a:rPr sz="1200" b="1" i="0">
+                <a:solidFill>
+                  <a:srgbClr val="1F497D"/>
+                </a:solidFill>
+                <a:latin typeface="Arial"/>
+              </a:rPr>
+              <a:t>Detailed explanation of the proposed solution</a:t>
+            </a:r>
+          </a:p>
+        </p:txBody>
+      </p:sp>
+      <p:sp>
+        <p:nvSpPr>
+          <p:cNvPr id="15365" name="Pentagon 15364"/>
+          <p:cNvSpPr/>
+          <p:nvPr/>
+        </p:nvSpPr>
+        <p:spPr>
+          <a:xfrm>
+            <a:off x="365760" y="2286000"/>
+            <a:ext cx="2194560" cy="384048"/>
+          </a:xfrm>
+          <a:prstGeom prst="homePlate">
+            <a:avLst/>
+          </a:prstGeom>
+          <a:solidFill>
+            <a:srgbClr val="0070C0"/>
+          </a:solidFill>
+          <a:ln>
+            <a:noFill/>
+          </a:ln>
+          <a:effectLst/>
+        </p:spPr>
+        <p:style>
+          <a:lnRef idx="1">
+            <a:schemeClr val="accent1"/>
+          </a:lnRef>
+          <a:fillRef idx="3">
+            <a:schemeClr val="accent1"/>
+          </a:fillRef>
+          <a:effectRef idx="2">
+            <a:schemeClr val="accent1"/>
+          </a:effectRef>
+          <a:fontRef idx="minor">
+            <a:schemeClr val="lt1"/>
+          </a:fontRef>
+        </p:style>
+        <p:txBody>
+          <a:bodyPr rtlCol="0" anchor="ctr" wrap="square" lIns="109728" rIns="109728" tIns="27432" bIns="27432"/>
+          <a:lstStyle/>
+          <a:p>
+            <a:pPr algn="l"/>
+            <a:r>
+              <a:rPr sz="1300" b="1" i="0">
+                <a:solidFill>
+                  <a:srgbClr val="FFFFFF"/>
+                </a:solidFill>
+                <a:latin typeface="Arial"/>
+              </a:rPr>
+              <a:t>1  Identify</a:t>
+            </a:r>
+          </a:p>
+        </p:txBody>
+      </p:sp>
+      <p:sp>
+        <p:nvSpPr>
+          <p:cNvPr id="15366" name="Rounded Rectangle 15365"/>
+          <p:cNvSpPr/>
+          <p:nvPr/>
+        </p:nvSpPr>
+        <p:spPr>
+          <a:xfrm>
+            <a:off x="365760" y="2697480"/>
+            <a:ext cx="2194560" cy="1024128"/>
+          </a:xfrm>
+          <a:prstGeom prst="roundRect">
+            <a:avLst>
+              <a:gd name="adj" fmla="val 5000"/>
+            </a:avLst>
+          </a:prstGeom>
+          <a:solidFill>
+            <a:srgbClr val="EAF1FA"/>
+          </a:solidFill>
+          <a:ln>
+            <a:noFill/>
+          </a:ln>
+          <a:effectLst/>
+        </p:spPr>
+        <p:style>
+          <a:lnRef idx="1">
+            <a:schemeClr val="accent1"/>
+          </a:lnRef>
+          <a:fillRef idx="3">
+            <a:schemeClr val="accent1"/>
+          </a:fillRef>
+          <a:effectRef idx="2">
+            <a:schemeClr val="accent1"/>
+          </a:effectRef>
+          <a:fontRef idx="minor">
+            <a:schemeClr val="lt1"/>
+          </a:fontRef>
+        </p:style>
+        <p:txBody>
+          <a:bodyPr rtlCol="0" anchor="t" wrap="square" tIns="27432" bIns="27432"/>
+          <a:lstStyle/>
+          <a:p>
+            <a:pPr algn="l" marL="146304" indent="-146304">
+              <a:spcAft>
+                <a:spcPts val="300"/>
+              </a:spcAft>
+              <a:buClr>
+                <a:srgbClr val="0070C0"/>
+              </a:buClr>
+              <a:buFont typeface="Arial"/>
+              <a:buChar char="•"/>
+            </a:pPr>
+            <a:r>
+              <a:rPr sz="1100" b="0" i="0">
+                <a:solidFill>
+                  <a:srgbClr val="1A1A1A"/>
+                </a:solidFill>
+                <a:latin typeface="Arial"/>
+              </a:rPr>
+              <a:t>RFID tap (card holds no health data) or mobile OTP</a:t>
+            </a:r>
+          </a:p>
+          <a:p>
+            <a:pPr algn="l" marL="146304" indent="-146304">
+              <a:spcAft>
+                <a:spcPts val="300"/>
+              </a:spcAft>
+              <a:buClr>
+                <a:srgbClr val="0070C0"/>
+              </a:buClr>
+              <a:buFont typeface="Arial"/>
+              <a:buChar char="•"/>
+            </a:pPr>
+            <a:r>
+              <a:rPr sz="1100" b="0" i="0">
+                <a:solidFill>
+                  <a:srgbClr val="1A1A1A"/>
+                </a:solidFill>
+                <a:latin typeface="Arial"/>
+              </a:rPr>
+              <a:t>13 languages · audio-guided consent</a:t>
+            </a:r>
+          </a:p>
+        </p:txBody>
+      </p:sp>
+      <p:sp>
+        <p:nvSpPr>
+          <p:cNvPr id="15367" name="Pentagon 15366"/>
+          <p:cNvSpPr/>
+          <p:nvPr/>
+        </p:nvSpPr>
+        <p:spPr>
+          <a:xfrm>
+            <a:off x="2679191" y="2286000"/>
+            <a:ext cx="2194560" cy="384048"/>
+          </a:xfrm>
+          <a:prstGeom prst="homePlate">
+            <a:avLst/>
+          </a:prstGeom>
+          <a:solidFill>
+            <a:srgbClr val="2E9E5B"/>
+          </a:solidFill>
+          <a:ln>
+            <a:noFill/>
+          </a:ln>
+          <a:effectLst/>
+        </p:spPr>
+        <p:style>
+          <a:lnRef idx="1">
+            <a:schemeClr val="accent1"/>
+          </a:lnRef>
+          <a:fillRef idx="3">
+            <a:schemeClr val="accent1"/>
+          </a:fillRef>
+          <a:effectRef idx="2">
+            <a:schemeClr val="accent1"/>
+          </a:effectRef>
+          <a:fontRef idx="minor">
+            <a:schemeClr val="lt1"/>
+          </a:fontRef>
+        </p:style>
+        <p:txBody>
+          <a:bodyPr rtlCol="0" anchor="ctr" wrap="square" lIns="109728" rIns="109728" tIns="27432" bIns="27432"/>
+          <a:lstStyle/>
+          <a:p>
+            <a:pPr algn="l"/>
+            <a:r>
+              <a:rPr sz="1300" b="1" i="0">
+                <a:solidFill>
+                  <a:srgbClr val="FFFFFF"/>
+                </a:solidFill>
+                <a:latin typeface="Arial"/>
+              </a:rPr>
+              <a:t>2  Converse</a:t>
+            </a:r>
+          </a:p>
+        </p:txBody>
+      </p:sp>
+      <p:sp>
+        <p:nvSpPr>
+          <p:cNvPr id="15368" name="Rounded Rectangle 15367"/>
+          <p:cNvSpPr/>
+          <p:nvPr/>
+        </p:nvSpPr>
+        <p:spPr>
+          <a:xfrm>
+            <a:off x="2679191" y="2697480"/>
+            <a:ext cx="2194560" cy="1024128"/>
+          </a:xfrm>
+          <a:prstGeom prst="roundRect">
+            <a:avLst>
+              <a:gd name="adj" fmla="val 5000"/>
+            </a:avLst>
+          </a:prstGeom>
+          <a:solidFill>
+            <a:srgbClr val="EAF1FA"/>
+          </a:solidFill>
+          <a:ln>
+            <a:noFill/>
+          </a:ln>
+          <a:effectLst/>
+        </p:spPr>
+        <p:style>
+          <a:lnRef idx="1">
+            <a:schemeClr val="accent1"/>
+          </a:lnRef>
+          <a:fillRef idx="3">
+            <a:schemeClr val="accent1"/>
+          </a:fillRef>
+          <a:effectRef idx="2">
+            <a:schemeClr val="accent1"/>
+          </a:effectRef>
+          <a:fontRef idx="minor">
+            <a:schemeClr val="lt1"/>
+          </a:fontRef>
+        </p:style>
+        <p:txBody>
+          <a:bodyPr rtlCol="0" anchor="t" wrap="square" tIns="27432" bIns="27432"/>
+          <a:lstStyle/>
+          <a:p>
+            <a:pPr algn="l" marL="146304" indent="-146304">
+              <a:spcAft>
+                <a:spcPts val="300"/>
+              </a:spcAft>
+              <a:buClr>
+                <a:srgbClr val="2E9E5B"/>
+              </a:buClr>
+              <a:buFont typeface="Arial"/>
+              <a:buChar char="•"/>
+            </a:pPr>
+            <a:r>
+              <a:rPr sz="1100" b="0" i="0">
+                <a:solidFill>
+                  <a:srgbClr val="1A1A1A"/>
+                </a:solidFill>
+                <a:latin typeface="Arial"/>
+              </a:rPr>
+              <a:t>Adaptive history by voice or touch</a:t>
+            </a:r>
+          </a:p>
+          <a:p>
+            <a:pPr algn="l" marL="146304" indent="-146304">
+              <a:spcAft>
+                <a:spcPts val="300"/>
+              </a:spcAft>
+              <a:buClr>
+                <a:srgbClr val="2E9E5B"/>
+              </a:buClr>
+              <a:buFont typeface="Arial"/>
+              <a:buChar char="•"/>
+            </a:pPr>
+            <a:r>
+              <a:rPr sz="1100" b="0" i="0">
+                <a:solidFill>
+                  <a:srgbClr val="1A1A1A"/>
+                </a:solidFill>
+                <a:latin typeface="Arial"/>
+              </a:rPr>
+              <a:t>AYUSH mode · instant red-flag alert</a:t>
+            </a:r>
+          </a:p>
+        </p:txBody>
+      </p:sp>
+      <p:sp>
+        <p:nvSpPr>
+          <p:cNvPr id="15369" name="Pentagon 15368"/>
+          <p:cNvSpPr/>
+          <p:nvPr/>
+        </p:nvSpPr>
+        <p:spPr>
+          <a:xfrm>
+            <a:off x="4992624" y="2286000"/>
+            <a:ext cx="2194560" cy="384048"/>
+          </a:xfrm>
+          <a:prstGeom prst="homePlate">
+            <a:avLst/>
+          </a:prstGeom>
+          <a:solidFill>
+            <a:srgbClr val="E8802A"/>
+          </a:solidFill>
+          <a:ln>
+            <a:noFill/>
+          </a:ln>
+          <a:effectLst/>
+        </p:spPr>
+        <p:style>
+          <a:lnRef idx="1">
+            <a:schemeClr val="accent1"/>
+          </a:lnRef>
+          <a:fillRef idx="3">
+            <a:schemeClr val="accent1"/>
+          </a:fillRef>
+          <a:effectRef idx="2">
+            <a:schemeClr val="accent1"/>
+          </a:effectRef>
+          <a:fontRef idx="minor">
+            <a:schemeClr val="lt1"/>
+          </a:fontRef>
+        </p:style>
+        <p:txBody>
+          <a:bodyPr rtlCol="0" anchor="ctr" wrap="square" lIns="109728" rIns="109728" tIns="27432" bIns="27432"/>
+          <a:lstStyle/>
+          <a:p>
+            <a:pPr algn="l"/>
+            <a:r>
+              <a:rPr sz="1300" b="1" i="0">
+                <a:solidFill>
+                  <a:srgbClr val="FFFFFF"/>
+                </a:solidFill>
+                <a:latin typeface="Arial"/>
+              </a:rPr>
+              <a:t>3  Scan</a:t>
+            </a:r>
+          </a:p>
+        </p:txBody>
+      </p:sp>
+      <p:sp>
+        <p:nvSpPr>
+          <p:cNvPr id="15370" name="Rounded Rectangle 15369"/>
+          <p:cNvSpPr/>
+          <p:nvPr/>
+        </p:nvSpPr>
+        <p:spPr>
+          <a:xfrm>
+            <a:off x="4992624" y="2697480"/>
+            <a:ext cx="2194560" cy="1024128"/>
+          </a:xfrm>
+          <a:prstGeom prst="roundRect">
+            <a:avLst>
+              <a:gd name="adj" fmla="val 5000"/>
+            </a:avLst>
+          </a:prstGeom>
+          <a:solidFill>
+            <a:srgbClr val="EAF1FA"/>
+          </a:solidFill>
+          <a:ln>
+            <a:noFill/>
+          </a:ln>
+          <a:effectLst/>
+        </p:spPr>
+        <p:style>
+          <a:lnRef idx="1">
+            <a:schemeClr val="accent1"/>
+          </a:lnRef>
+          <a:fillRef idx="3">
+            <a:schemeClr val="accent1"/>
+          </a:fillRef>
+          <a:effectRef idx="2">
+            <a:schemeClr val="accent1"/>
+          </a:effectRef>
+          <a:fontRef idx="minor">
+            <a:schemeClr val="lt1"/>
+          </a:fontRef>
+        </p:style>
+        <p:txBody>
+          <a:bodyPr rtlCol="0" anchor="t" wrap="square" tIns="27432" bIns="27432"/>
+          <a:lstStyle/>
+          <a:p>
+            <a:pPr algn="l" marL="146304" indent="-146304">
+              <a:spcAft>
+                <a:spcPts val="300"/>
+              </a:spcAft>
+              <a:buClr>
+                <a:srgbClr val="E8802A"/>
+              </a:buClr>
+              <a:buFont typeface="Arial"/>
+              <a:buChar char="•"/>
+            </a:pPr>
+            <a:r>
+              <a:rPr sz="1100" b="0" i="0">
+                <a:solidFill>
+                  <a:srgbClr val="1A1A1A"/>
+                </a:solidFill>
+                <a:latin typeface="Arial"/>
+              </a:rPr>
+              <a:t>Camera OCR of Rx, labs, discharge notes</a:t>
+            </a:r>
+          </a:p>
+          <a:p>
+            <a:pPr algn="l" marL="146304" indent="-146304">
+              <a:spcAft>
+                <a:spcPts val="300"/>
+              </a:spcAft>
+              <a:buClr>
+                <a:srgbClr val="E8802A"/>
+              </a:buClr>
+              <a:buFont typeface="Arial"/>
+              <a:buChar char="•"/>
+            </a:pPr>
+            <a:r>
+              <a:rPr sz="1100" b="0" i="0">
+                <a:solidFill>
+                  <a:srgbClr val="1A1A1A"/>
+                </a:solidFill>
+                <a:latin typeface="Arial"/>
+              </a:rPr>
+              <a:t>Meds, doses, lab values marked ‘needs verification’</a:t>
+            </a:r>
+          </a:p>
+        </p:txBody>
+      </p:sp>
+      <p:sp>
+        <p:nvSpPr>
+          <p:cNvPr id="15371" name="Pentagon 15370"/>
+          <p:cNvSpPr/>
+          <p:nvPr/>
+        </p:nvSpPr>
+        <p:spPr>
+          <a:xfrm>
+            <a:off x="7306056" y="2286000"/>
+            <a:ext cx="2194560" cy="384048"/>
+          </a:xfrm>
+          <a:prstGeom prst="homePlate">
+            <a:avLst/>
+          </a:prstGeom>
+          <a:solidFill>
+            <a:srgbClr val="0070C0"/>
+          </a:solidFill>
+          <a:ln>
+            <a:noFill/>
+          </a:ln>
+          <a:effectLst/>
+        </p:spPr>
+        <p:style>
+          <a:lnRef idx="1">
+            <a:schemeClr val="accent1"/>
+          </a:lnRef>
+          <a:fillRef idx="3">
+            <a:schemeClr val="accent1"/>
+          </a:fillRef>
+          <a:effectRef idx="2">
+            <a:schemeClr val="accent1"/>
+          </a:effectRef>
+          <a:fontRef idx="minor">
+            <a:schemeClr val="lt1"/>
+          </a:fontRef>
+        </p:style>
+        <p:txBody>
+          <a:bodyPr rtlCol="0" anchor="ctr" wrap="square" lIns="109728" rIns="109728" tIns="27432" bIns="27432"/>
+          <a:lstStyle/>
+          <a:p>
+            <a:pPr algn="l"/>
+            <a:r>
+              <a:rPr sz="1300" b="1" i="0">
+                <a:solidFill>
+                  <a:srgbClr val="FFFFFF"/>
+                </a:solidFill>
+                <a:latin typeface="Arial"/>
+              </a:rPr>
+              <a:t>4  Summarise</a:t>
+            </a:r>
+          </a:p>
+        </p:txBody>
+      </p:sp>
+      <p:sp>
+        <p:nvSpPr>
+          <p:cNvPr id="15372" name="Rounded Rectangle 15371"/>
+          <p:cNvSpPr/>
+          <p:nvPr/>
+        </p:nvSpPr>
+        <p:spPr>
+          <a:xfrm>
+            <a:off x="7306056" y="2697480"/>
+            <a:ext cx="2194560" cy="1024128"/>
+          </a:xfrm>
+          <a:prstGeom prst="roundRect">
+            <a:avLst>
+              <a:gd name="adj" fmla="val 5000"/>
+            </a:avLst>
+          </a:prstGeom>
+          <a:solidFill>
+            <a:srgbClr val="EAF1FA"/>
+          </a:solidFill>
+          <a:ln>
+            <a:noFill/>
+          </a:ln>
+          <a:effectLst/>
+        </p:spPr>
+        <p:style>
+          <a:lnRef idx="1">
+            <a:schemeClr val="accent1"/>
+          </a:lnRef>
+          <a:fillRef idx="3">
+            <a:schemeClr val="accent1"/>
+          </a:fillRef>
+          <a:effectRef idx="2">
+            <a:schemeClr val="accent1"/>
+          </a:effectRef>
+          <a:fontRef idx="minor">
+            <a:schemeClr val="lt1"/>
+          </a:fontRef>
+        </p:style>
+        <p:txBody>
+          <a:bodyPr rtlCol="0" anchor="t" wrap="square" tIns="27432" bIns="27432"/>
+          <a:lstStyle/>
+          <a:p>
+            <a:pPr algn="l" marL="146304" indent="-146304">
+              <a:spcAft>
+                <a:spcPts val="300"/>
+              </a:spcAft>
+              <a:buClr>
+                <a:srgbClr val="0070C0"/>
+              </a:buClr>
+              <a:buFont typeface="Arial"/>
+              <a:buChar char="•"/>
+            </a:pPr>
+            <a:r>
+              <a:rPr sz="1100" b="0" i="0">
+                <a:solidFill>
+                  <a:srgbClr val="1A1A1A"/>
+                </a:solidFill>
+                <a:latin typeface="Arial"/>
+              </a:rPr>
+              <a:t>Structured summary + medical timeline</a:t>
+            </a:r>
+          </a:p>
+          <a:p>
+            <a:pPr algn="l" marL="146304" indent="-146304">
+              <a:spcAft>
+                <a:spcPts val="300"/>
+              </a:spcAft>
+              <a:buClr>
+                <a:srgbClr val="0070C0"/>
+              </a:buClr>
+              <a:buFont typeface="Arial"/>
+              <a:buChar char="•"/>
+            </a:pPr>
+            <a:r>
+              <a:rPr sz="1100" b="0" i="0">
+                <a:solidFill>
+                  <a:srgbClr val="1A1A1A"/>
+                </a:solidFill>
+                <a:latin typeface="Arial"/>
+              </a:rPr>
+              <a:t>Live on doctor’s screen via WebSocket</a:t>
+            </a:r>
+          </a:p>
+        </p:txBody>
+      </p:sp>
+      <p:sp>
+        <p:nvSpPr>
+          <p:cNvPr id="15373" name="Pentagon 15372"/>
+          <p:cNvSpPr/>
+          <p:nvPr/>
+        </p:nvSpPr>
+        <p:spPr>
+          <a:xfrm>
+            <a:off x="9619488" y="2286000"/>
+            <a:ext cx="2194560" cy="384048"/>
+          </a:xfrm>
+          <a:prstGeom prst="homePlate">
+            <a:avLst/>
+          </a:prstGeom>
+          <a:solidFill>
+            <a:srgbClr val="2E9E5B"/>
+          </a:solidFill>
+          <a:ln>
+            <a:noFill/>
+          </a:ln>
+          <a:effectLst/>
+        </p:spPr>
+        <p:style>
+          <a:lnRef idx="1">
+            <a:schemeClr val="accent1"/>
+          </a:lnRef>
+          <a:fillRef idx="3">
+            <a:schemeClr val="accent1"/>
+          </a:fillRef>
+          <a:effectRef idx="2">
+            <a:schemeClr val="accent1"/>
+          </a:effectRef>
+          <a:fontRef idx="minor">
+            <a:schemeClr val="lt1"/>
+          </a:fontRef>
+        </p:style>
+        <p:txBody>
+          <a:bodyPr rtlCol="0" anchor="ctr" wrap="square" lIns="109728" rIns="109728" tIns="27432" bIns="27432"/>
+          <a:lstStyle/>
+          <a:p>
+            <a:pPr algn="l"/>
+            <a:r>
+              <a:rPr sz="1300" b="1" i="0">
+                <a:solidFill>
+                  <a:srgbClr val="FFFFFF"/>
+                </a:solidFill>
+                <a:latin typeface="Arial"/>
+              </a:rPr>
+              <a:t>5  Consult</a:t>
+            </a:r>
+          </a:p>
+        </p:txBody>
+      </p:sp>
+      <p:sp>
+        <p:nvSpPr>
+          <p:cNvPr id="15374" name="Rounded Rectangle 15373"/>
+          <p:cNvSpPr/>
+          <p:nvPr/>
+        </p:nvSpPr>
+        <p:spPr>
+          <a:xfrm>
+            <a:off x="9619488" y="2697480"/>
+            <a:ext cx="2194560" cy="1024128"/>
+          </a:xfrm>
+          <a:prstGeom prst="roundRect">
+            <a:avLst>
+              <a:gd name="adj" fmla="val 5000"/>
+            </a:avLst>
+          </a:prstGeom>
+          <a:solidFill>
+            <a:srgbClr val="EAF1FA"/>
+          </a:solidFill>
+          <a:ln>
+            <a:noFill/>
+          </a:ln>
+          <a:effectLst/>
+        </p:spPr>
+        <p:style>
+          <a:lnRef idx="1">
+            <a:schemeClr val="accent1"/>
+          </a:lnRef>
+          <a:fillRef idx="3">
+            <a:schemeClr val="accent1"/>
+          </a:fillRef>
+          <a:effectRef idx="2">
+            <a:schemeClr val="accent1"/>
+          </a:effectRef>
+          <a:fontRef idx="minor">
+            <a:schemeClr val="lt1"/>
+          </a:fontRef>
+        </p:style>
+        <p:txBody>
+          <a:bodyPr rtlCol="0" anchor="t" wrap="square" tIns="27432" bIns="27432"/>
+          <a:lstStyle/>
+          <a:p>
+            <a:pPr algn="l" marL="146304" indent="-146304">
+              <a:spcAft>
+                <a:spcPts val="300"/>
+              </a:spcAft>
+              <a:buClr>
+                <a:srgbClr val="2E9E5B"/>
+              </a:buClr>
+              <a:buFont typeface="Arial"/>
+              <a:buChar char="•"/>
+            </a:pPr>
+            <a:r>
+              <a:rPr sz="1100" b="0" i="0">
+                <a:solidFill>
+                  <a:srgbClr val="1A1A1A"/>
+                </a:solidFill>
+                <a:latin typeface="Arial"/>
+              </a:rPr>
+              <a:t>Doctor edits / accepts / rejects</a:t>
+            </a:r>
+          </a:p>
+          <a:p>
+            <a:pPr algn="l" marL="146304" indent="-146304">
+              <a:spcAft>
+                <a:spcPts val="300"/>
+              </a:spcAft>
+              <a:buClr>
+                <a:srgbClr val="2E9E5B"/>
+              </a:buClr>
+              <a:buFont typeface="Arial"/>
+              <a:buChar char="•"/>
+            </a:pPr>
+            <a:r>
+              <a:rPr sz="1100" b="0" i="0">
+                <a:solidFill>
+                  <a:srgbClr val="1A1A1A"/>
+                </a:solidFill>
+                <a:latin typeface="Arial"/>
+              </a:rPr>
+              <a:t>Rx-safety alerts · FHIR-ready record</a:t>
+            </a:r>
+          </a:p>
+        </p:txBody>
+      </p:sp>
+      <p:sp>
+        <p:nvSpPr>
+          <p:cNvPr id="15375" name="TextBox 15374"/>
+          <p:cNvSpPr txBox="1"/>
+          <p:nvPr/>
+        </p:nvSpPr>
+        <p:spPr>
+          <a:xfrm>
+            <a:off x="365760" y="3858768"/>
+            <a:ext cx="5852160" cy="274320"/>
+          </a:xfrm>
+          <a:prstGeom prst="rect">
+            <a:avLst/>
+          </a:prstGeom>
+          <a:noFill/>
+        </p:spPr>
+        <p:txBody>
+          <a:bodyPr wrap="square" lIns="36576" rIns="36576" tIns="18288" bIns="18288" anchor="ctr">
+            <a:spAutoFit/>
+          </a:bodyPr>
+          <a:lstStyle/>
+          <a:p>
+            <a:pPr algn="l"/>
+            <a:r>
+              <a:rPr sz="1000" b="0" i="0">
+                <a:solidFill>
+                  <a:srgbClr val="E8802A"/>
+                </a:solidFill>
+                <a:latin typeface="Arial"/>
+              </a:rPr>
+              <a:t>■ </a:t>
+            </a:r>
+            <a:r>
+              <a:rPr sz="1200" b="1" i="0">
+                <a:solidFill>
+                  <a:srgbClr val="1F497D"/>
+                </a:solidFill>
+                <a:latin typeface="Arial"/>
+              </a:rPr>
+              <a:t>How it addresses the problem</a:t>
+            </a:r>
+          </a:p>
+        </p:txBody>
+      </p:sp>
+      <p:sp>
+        <p:nvSpPr>
+          <p:cNvPr id="15376" name="Rounded Rectangle 15375"/>
+          <p:cNvSpPr/>
+          <p:nvPr/>
+        </p:nvSpPr>
+        <p:spPr>
+          <a:xfrm>
+            <a:off x="365760" y="4187952"/>
+            <a:ext cx="2194560" cy="365760"/>
+          </a:xfrm>
+          <a:prstGeom prst="roundRect">
+            <a:avLst>
+              <a:gd name="adj" fmla="val 15000"/>
+            </a:avLst>
+          </a:prstGeom>
+          <a:solidFill>
+            <a:srgbClr val="FDECEC"/>
+          </a:solidFill>
+          <a:ln>
+            <a:noFill/>
+          </a:ln>
+          <a:effectLst/>
+        </p:spPr>
+        <p:style>
+          <a:lnRef idx="1">
+            <a:schemeClr val="accent1"/>
+          </a:lnRef>
+          <a:fillRef idx="3">
+            <a:schemeClr val="accent1"/>
+          </a:fillRef>
+          <a:effectRef idx="2">
+            <a:schemeClr val="accent1"/>
+          </a:effectRef>
+          <a:fontRef idx="minor">
+            <a:schemeClr val="lt1"/>
+          </a:fontRef>
+        </p:style>
+        <p:txBody>
+          <a:bodyPr rtlCol="0" anchor="ctr" wrap="square" tIns="27432" bIns="27432"/>
+          <a:lstStyle/>
+          <a:p>
+            <a:pPr algn="l"/>
+            <a:r>
+              <a:rPr sz="1000" b="0" i="0">
+                <a:solidFill>
+                  <a:srgbClr val="1A1A1A"/>
+                </a:solidFill>
+                <a:latin typeface="Arial"/>
+              </a:rPr>
+              <a:t>2–5 min consults; history skipped</a:t>
+            </a:r>
+          </a:p>
+        </p:txBody>
+      </p:sp>
+      <p:sp>
+        <p:nvSpPr>
+          <p:cNvPr id="15377" name="Right Arrow 15376"/>
+          <p:cNvSpPr/>
+          <p:nvPr/>
+        </p:nvSpPr>
+        <p:spPr>
+          <a:xfrm>
+            <a:off x="2606040" y="4279392"/>
+            <a:ext cx="201168" cy="182880"/>
+          </a:xfrm>
+          <a:prstGeom prst="rightArrow">
+            <a:avLst/>
+          </a:prstGeom>
+          <a:solidFill>
+            <a:srgbClr val="9FB0C3"/>
+          </a:solidFill>
+          <a:ln>
+            <a:noFill/>
+          </a:ln>
+          <a:effectLst/>
+        </p:spPr>
+        <p:style>
+          <a:lnRef idx="1">
+            <a:schemeClr val="accent1"/>
+          </a:lnRef>
+          <a:fillRef idx="3">
+            <a:schemeClr val="accent1"/>
+          </a:fillRef>
+          <a:effectRef idx="2">
+            <a:schemeClr val="accent1"/>
+          </a:effectRef>
+          <a:fontRef idx="minor">
+            <a:schemeClr val="lt1"/>
+          </a:fontRef>
+        </p:style>
+        <p:txBody>
+          <a:bodyPr rtlCol="0" anchor="ctr" wrap="square" lIns="54864" rIns="54864" tIns="27432" bIns="27432"/>
+          <a:lstStyle/>
+          <a:p>
+            <a:pPr algn="ctr"/>
+          </a:p>
+        </p:txBody>
+      </p:sp>
+      <p:sp>
+        <p:nvSpPr>
+          <p:cNvPr id="15378" name="Rounded Rectangle 15377"/>
+          <p:cNvSpPr/>
+          <p:nvPr/>
+        </p:nvSpPr>
+        <p:spPr>
+          <a:xfrm>
+            <a:off x="2852928" y="4187952"/>
+            <a:ext cx="3520440" cy="365760"/>
+          </a:xfrm>
+          <a:prstGeom prst="roundRect">
+            <a:avLst>
+              <a:gd name="adj" fmla="val 15000"/>
+            </a:avLst>
+          </a:prstGeom>
+          <a:solidFill>
+            <a:srgbClr val="E6F4EC"/>
+          </a:solidFill>
+          <a:ln>
+            <a:noFill/>
+          </a:ln>
+          <a:effectLst/>
+        </p:spPr>
+        <p:style>
+          <a:lnRef idx="1">
+            <a:schemeClr val="accent1"/>
+          </a:lnRef>
+          <a:fillRef idx="3">
+            <a:schemeClr val="accent1"/>
+          </a:fillRef>
+          <a:effectRef idx="2">
+            <a:schemeClr val="accent1"/>
+          </a:effectRef>
+          <a:fontRef idx="minor">
+            <a:schemeClr val="lt1"/>
+          </a:fontRef>
+        </p:style>
+        <p:txBody>
+          <a:bodyPr rtlCol="0" anchor="ctr" wrap="square" tIns="27432" bIns="27432"/>
+          <a:lstStyle/>
+          <a:p>
+            <a:pPr algn="l"/>
+            <a:r>
+              <a:rPr sz="1000" b="0" i="0">
+                <a:solidFill>
+                  <a:srgbClr val="1A1A1A"/>
+                </a:solidFill>
+                <a:latin typeface="Arial"/>
+              </a:rPr>
+              <a:t>History taken before the visit; doctor reads it in seconds</a:t>
+            </a:r>
+          </a:p>
+        </p:txBody>
+      </p:sp>
+      <p:sp>
+        <p:nvSpPr>
+          <p:cNvPr id="15379" name="Rounded Rectangle 15378"/>
+          <p:cNvSpPr/>
+          <p:nvPr/>
+        </p:nvSpPr>
+        <p:spPr>
+          <a:xfrm>
+            <a:off x="365760" y="4599432"/>
+            <a:ext cx="2194560" cy="365760"/>
+          </a:xfrm>
+          <a:prstGeom prst="roundRect">
+            <a:avLst>
+              <a:gd name="adj" fmla="val 15000"/>
+            </a:avLst>
+          </a:prstGeom>
+          <a:solidFill>
+            <a:srgbClr val="FDECEC"/>
+          </a:solidFill>
+          <a:ln>
+            <a:noFill/>
+          </a:ln>
+          <a:effectLst/>
+        </p:spPr>
+        <p:style>
+          <a:lnRef idx="1">
+            <a:schemeClr val="accent1"/>
+          </a:lnRef>
+          <a:fillRef idx="3">
+            <a:schemeClr val="accent1"/>
+          </a:fillRef>
+          <a:effectRef idx="2">
+            <a:schemeClr val="accent1"/>
+          </a:effectRef>
+          <a:fontRef idx="minor">
+            <a:schemeClr val="lt1"/>
+          </a:fontRef>
+        </p:style>
+        <p:txBody>
+          <a:bodyPr rtlCol="0" anchor="ctr" wrap="square" tIns="27432" bIns="27432"/>
+          <a:lstStyle/>
+          <a:p>
+            <a:pPr algn="l"/>
+            <a:r>
+              <a:rPr sz="1000" b="0" i="0">
+                <a:solidFill>
+                  <a:srgbClr val="1A1A1A"/>
+                </a:solidFill>
+                <a:latin typeface="Arial"/>
+              </a:rPr>
+              <a:t>Paper records, in no order</a:t>
+            </a:r>
+          </a:p>
+        </p:txBody>
+      </p:sp>
+      <p:sp>
+        <p:nvSpPr>
+          <p:cNvPr id="15380" name="Right Arrow 15379"/>
+          <p:cNvSpPr/>
+          <p:nvPr/>
+        </p:nvSpPr>
+        <p:spPr>
+          <a:xfrm>
+            <a:off x="2606040" y="4690872"/>
+            <a:ext cx="201168" cy="182880"/>
+          </a:xfrm>
+          <a:prstGeom prst="rightArrow">
+            <a:avLst/>
+          </a:prstGeom>
+          <a:solidFill>
+            <a:srgbClr val="9FB0C3"/>
+          </a:solidFill>
+          <a:ln>
+            <a:noFill/>
+          </a:ln>
+          <a:effectLst/>
+        </p:spPr>
+        <p:style>
+          <a:lnRef idx="1">
+            <a:schemeClr val="accent1"/>
+          </a:lnRef>
+          <a:fillRef idx="3">
+            <a:schemeClr val="accent1"/>
+          </a:fillRef>
+          <a:effectRef idx="2">
+            <a:schemeClr val="accent1"/>
+          </a:effectRef>
+          <a:fontRef idx="minor">
+            <a:schemeClr val="lt1"/>
+          </a:fontRef>
+        </p:style>
+        <p:txBody>
+          <a:bodyPr rtlCol="0" anchor="ctr" wrap="square" lIns="54864" rIns="54864" tIns="27432" bIns="27432"/>
+          <a:lstStyle/>
+          <a:p>
+            <a:pPr algn="ctr"/>
+          </a:p>
+        </p:txBody>
+      </p:sp>
+      <p:sp>
+        <p:nvSpPr>
+          <p:cNvPr id="15381" name="Rounded Rectangle 15380"/>
+          <p:cNvSpPr/>
+          <p:nvPr/>
+        </p:nvSpPr>
+        <p:spPr>
+          <a:xfrm>
+            <a:off x="2852928" y="4599432"/>
+            <a:ext cx="3520440" cy="365760"/>
+          </a:xfrm>
+          <a:prstGeom prst="roundRect">
+            <a:avLst>
+              <a:gd name="adj" fmla="val 15000"/>
+            </a:avLst>
+          </a:prstGeom>
+          <a:solidFill>
+            <a:srgbClr val="E6F4EC"/>
+          </a:solidFill>
+          <a:ln>
+            <a:noFill/>
+          </a:ln>
+          <a:effectLst/>
+        </p:spPr>
+        <p:style>
+          <a:lnRef idx="1">
+            <a:schemeClr val="accent1"/>
+          </a:lnRef>
+          <a:fillRef idx="3">
+            <a:schemeClr val="accent1"/>
+          </a:fillRef>
+          <a:effectRef idx="2">
+            <a:schemeClr val="accent1"/>
+          </a:effectRef>
+          <a:fontRef idx="minor">
+            <a:schemeClr val="lt1"/>
+          </a:fontRef>
+        </p:style>
+        <p:txBody>
+          <a:bodyPr rtlCol="0" anchor="ctr" wrap="square" tIns="27432" bIns="27432"/>
+          <a:lstStyle/>
+          <a:p>
+            <a:pPr algn="l"/>
+            <a:r>
+              <a:rPr sz="1000" b="0" i="0">
+                <a:solidFill>
+                  <a:srgbClr val="1A1A1A"/>
+                </a:solidFill>
+                <a:latin typeface="Arial"/>
+              </a:rPr>
+              <a:t>Camera OCR → meds, labs, diagnoses on a timeline</a:t>
+            </a:r>
+          </a:p>
+        </p:txBody>
+      </p:sp>
+      <p:sp>
+        <p:nvSpPr>
+          <p:cNvPr id="15382" name="Rounded Rectangle 15381"/>
+          <p:cNvSpPr/>
+          <p:nvPr/>
+        </p:nvSpPr>
+        <p:spPr>
+          <a:xfrm>
+            <a:off x="365760" y="5010912"/>
+            <a:ext cx="2194560" cy="365760"/>
+          </a:xfrm>
+          <a:prstGeom prst="roundRect">
+            <a:avLst>
+              <a:gd name="adj" fmla="val 15000"/>
+            </a:avLst>
+          </a:prstGeom>
+          <a:solidFill>
+            <a:srgbClr val="FDECEC"/>
+          </a:solidFill>
+          <a:ln>
+            <a:noFill/>
+          </a:ln>
+          <a:effectLst/>
+        </p:spPr>
+        <p:style>
+          <a:lnRef idx="1">
+            <a:schemeClr val="accent1"/>
+          </a:lnRef>
+          <a:fillRef idx="3">
+            <a:schemeClr val="accent1"/>
+          </a:fillRef>
+          <a:effectRef idx="2">
+            <a:schemeClr val="accent1"/>
+          </a:effectRef>
+          <a:fontRef idx="minor">
+            <a:schemeClr val="lt1"/>
+          </a:fontRef>
+        </p:style>
+        <p:txBody>
+          <a:bodyPr rtlCol="0" anchor="ctr" wrap="square" tIns="27432" bIns="27432"/>
+          <a:lstStyle/>
+          <a:p>
+            <a:pPr algn="l"/>
+            <a:r>
+              <a:rPr sz="1000" b="0" i="0">
+                <a:solidFill>
+                  <a:srgbClr val="1A1A1A"/>
+                </a:solidFill>
+                <a:latin typeface="Arial"/>
+              </a:rPr>
+              <a:t>Apps exclude elderly / rural users</a:t>
+            </a:r>
+          </a:p>
+        </p:txBody>
+      </p:sp>
+      <p:sp>
+        <p:nvSpPr>
+          <p:cNvPr id="15383" name="Right Arrow 15382"/>
+          <p:cNvSpPr/>
+          <p:nvPr/>
+        </p:nvSpPr>
+        <p:spPr>
+          <a:xfrm>
+            <a:off x="2606040" y="5102352"/>
+            <a:ext cx="201168" cy="182880"/>
+          </a:xfrm>
+          <a:prstGeom prst="rightArrow">
+            <a:avLst/>
+          </a:prstGeom>
+          <a:solidFill>
+            <a:srgbClr val="9FB0C3"/>
+          </a:solidFill>
+          <a:ln>
+            <a:noFill/>
+          </a:ln>
+          <a:effectLst/>
+        </p:spPr>
+        <p:style>
+          <a:lnRef idx="1">
+            <a:schemeClr val="accent1"/>
+          </a:lnRef>
+          <a:fillRef idx="3">
+            <a:schemeClr val="accent1"/>
+          </a:fillRef>
+          <a:effectRef idx="2">
+            <a:schemeClr val="accent1"/>
+          </a:effectRef>
+          <a:fontRef idx="minor">
+            <a:schemeClr val="lt1"/>
+          </a:fontRef>
+        </p:style>
+        <p:txBody>
+          <a:bodyPr rtlCol="0" anchor="ctr" wrap="square" lIns="54864" rIns="54864" tIns="27432" bIns="27432"/>
+          <a:lstStyle/>
+          <a:p>
+            <a:pPr algn="ctr"/>
+          </a:p>
+        </p:txBody>
+      </p:sp>
+      <p:sp>
+        <p:nvSpPr>
+          <p:cNvPr id="15384" name="Rounded Rectangle 15383"/>
+          <p:cNvSpPr/>
+          <p:nvPr/>
+        </p:nvSpPr>
+        <p:spPr>
+          <a:xfrm>
+            <a:off x="2852928" y="5010912"/>
+            <a:ext cx="3520440" cy="365760"/>
+          </a:xfrm>
+          <a:prstGeom prst="roundRect">
+            <a:avLst>
+              <a:gd name="adj" fmla="val 15000"/>
+            </a:avLst>
+          </a:prstGeom>
+          <a:solidFill>
+            <a:srgbClr val="E6F4EC"/>
+          </a:solidFill>
+          <a:ln>
+            <a:noFill/>
+          </a:ln>
+          <a:effectLst/>
+        </p:spPr>
+        <p:style>
+          <a:lnRef idx="1">
+            <a:schemeClr val="accent1"/>
+          </a:lnRef>
+          <a:fillRef idx="3">
+            <a:schemeClr val="accent1"/>
+          </a:fillRef>
+          <a:effectRef idx="2">
+            <a:schemeClr val="accent1"/>
+          </a:effectRef>
+          <a:fontRef idx="minor">
+            <a:schemeClr val="lt1"/>
+          </a:fontRef>
+        </p:style>
+        <p:txBody>
+          <a:bodyPr rtlCol="0" anchor="ctr" wrap="square" tIns="27432" bIns="27432"/>
+          <a:lstStyle/>
+          <a:p>
+            <a:pPr algn="l"/>
+            <a:r>
+              <a:rPr sz="1000" b="0" i="0">
+                <a:solidFill>
+                  <a:srgbClr val="1A1A1A"/>
+                </a:solidFill>
+                <a:latin typeface="Arial"/>
+              </a:rPr>
+              <a:t>Kiosk: voice + touch, RFID tap, 13 languages, audio</a:t>
+            </a:r>
+          </a:p>
+        </p:txBody>
+      </p:sp>
+      <p:sp>
+        <p:nvSpPr>
+          <p:cNvPr id="15385" name="Rounded Rectangle 15384"/>
+          <p:cNvSpPr/>
+          <p:nvPr/>
+        </p:nvSpPr>
+        <p:spPr>
+          <a:xfrm>
+            <a:off x="365760" y="5422392"/>
+            <a:ext cx="2194560" cy="365760"/>
+          </a:xfrm>
+          <a:prstGeom prst="roundRect">
+            <a:avLst>
+              <a:gd name="adj" fmla="val 15000"/>
+            </a:avLst>
+          </a:prstGeom>
+          <a:solidFill>
+            <a:srgbClr val="FDECEC"/>
+          </a:solidFill>
+          <a:ln>
+            <a:noFill/>
+          </a:ln>
+          <a:effectLst/>
+        </p:spPr>
+        <p:style>
+          <a:lnRef idx="1">
+            <a:schemeClr val="accent1"/>
+          </a:lnRef>
+          <a:fillRef idx="3">
+            <a:schemeClr val="accent1"/>
+          </a:fillRef>
+          <a:effectRef idx="2">
+            <a:schemeClr val="accent1"/>
+          </a:effectRef>
+          <a:fontRef idx="minor">
+            <a:schemeClr val="lt1"/>
+          </a:fontRef>
+        </p:style>
+        <p:txBody>
+          <a:bodyPr rtlCol="0" anchor="ctr" wrap="square" tIns="27432" bIns="27432"/>
+          <a:lstStyle/>
+          <a:p>
+            <a:pPr algn="l"/>
+            <a:r>
+              <a:rPr sz="1000" b="0" i="0">
+                <a:solidFill>
+                  <a:srgbClr val="1A1A1A"/>
+                </a:solidFill>
+                <a:latin typeface="Arial"/>
+              </a:rPr>
+              <a:t>Emergencies wait in the queue</a:t>
+            </a:r>
+          </a:p>
+        </p:txBody>
+      </p:sp>
+      <p:sp>
+        <p:nvSpPr>
+          <p:cNvPr id="15386" name="Right Arrow 15385"/>
+          <p:cNvSpPr/>
+          <p:nvPr/>
+        </p:nvSpPr>
+        <p:spPr>
+          <a:xfrm>
+            <a:off x="2606040" y="5513832"/>
+            <a:ext cx="201168" cy="182880"/>
+          </a:xfrm>
+          <a:prstGeom prst="rightArrow">
+            <a:avLst/>
+          </a:prstGeom>
+          <a:solidFill>
+            <a:srgbClr val="9FB0C3"/>
+          </a:solidFill>
+          <a:ln>
+            <a:noFill/>
+          </a:ln>
+          <a:effectLst/>
+        </p:spPr>
+        <p:style>
+          <a:lnRef idx="1">
+            <a:schemeClr val="accent1"/>
+          </a:lnRef>
+          <a:fillRef idx="3">
+            <a:schemeClr val="accent1"/>
+          </a:fillRef>
+          <a:effectRef idx="2">
+            <a:schemeClr val="accent1"/>
+          </a:effectRef>
+          <a:fontRef idx="minor">
+            <a:schemeClr val="lt1"/>
+          </a:fontRef>
+        </p:style>
+        <p:txBody>
+          <a:bodyPr rtlCol="0" anchor="ctr" wrap="square" lIns="54864" rIns="54864" tIns="27432" bIns="27432"/>
+          <a:lstStyle/>
+          <a:p>
+            <a:pPr algn="ctr"/>
+          </a:p>
+        </p:txBody>
+      </p:sp>
+      <p:sp>
+        <p:nvSpPr>
+          <p:cNvPr id="15387" name="Rounded Rectangle 15386"/>
+          <p:cNvSpPr/>
+          <p:nvPr/>
+        </p:nvSpPr>
+        <p:spPr>
+          <a:xfrm>
+            <a:off x="2852928" y="5422392"/>
+            <a:ext cx="3520440" cy="365760"/>
+          </a:xfrm>
+          <a:prstGeom prst="roundRect">
+            <a:avLst>
+              <a:gd name="adj" fmla="val 15000"/>
+            </a:avLst>
+          </a:prstGeom>
+          <a:solidFill>
+            <a:srgbClr val="E6F4EC"/>
+          </a:solidFill>
+          <a:ln>
+            <a:noFill/>
+          </a:ln>
+          <a:effectLst/>
+        </p:spPr>
+        <p:style>
+          <a:lnRef idx="1">
+            <a:schemeClr val="accent1"/>
+          </a:lnRef>
+          <a:fillRef idx="3">
+            <a:schemeClr val="accent1"/>
+          </a:fillRef>
+          <a:effectRef idx="2">
+            <a:schemeClr val="accent1"/>
+          </a:effectRef>
+          <a:fontRef idx="minor">
+            <a:schemeClr val="lt1"/>
+          </a:fontRef>
+        </p:style>
+        <p:txBody>
+          <a:bodyPr rtlCol="0" anchor="ctr" wrap="square" tIns="27432" bIns="27432"/>
+          <a:lstStyle/>
+          <a:p>
+            <a:pPr algn="l"/>
+            <a:r>
+              <a:rPr sz="1000" b="0" i="0">
+                <a:solidFill>
+                  <a:srgbClr val="1A1A1A"/>
+                </a:solidFill>
+                <a:latin typeface="Arial"/>
+              </a:rPr>
+              <a:t>Rule-based red flag → top of queue, instantly</a:t>
+            </a:r>
+          </a:p>
+        </p:txBody>
+      </p:sp>
+      <p:sp>
+        <p:nvSpPr>
+          <p:cNvPr id="15388" name="Rounded Rectangle 15387"/>
+          <p:cNvSpPr/>
+          <p:nvPr/>
+        </p:nvSpPr>
+        <p:spPr>
+          <a:xfrm>
+            <a:off x="365760" y="5833872"/>
+            <a:ext cx="2194560" cy="365760"/>
+          </a:xfrm>
+          <a:prstGeom prst="roundRect">
+            <a:avLst>
+              <a:gd name="adj" fmla="val 15000"/>
+            </a:avLst>
+          </a:prstGeom>
+          <a:solidFill>
+            <a:srgbClr val="FDECEC"/>
+          </a:solidFill>
+          <a:ln>
+            <a:noFill/>
+          </a:ln>
+          <a:effectLst/>
+        </p:spPr>
+        <p:style>
+          <a:lnRef idx="1">
+            <a:schemeClr val="accent1"/>
+          </a:lnRef>
+          <a:fillRef idx="3">
+            <a:schemeClr val="accent1"/>
+          </a:fillRef>
+          <a:effectRef idx="2">
+            <a:schemeClr val="accent1"/>
+          </a:effectRef>
+          <a:fontRef idx="minor">
+            <a:schemeClr val="lt1"/>
+          </a:fontRef>
+        </p:style>
+        <p:txBody>
+          <a:bodyPr rtlCol="0" anchor="ctr" wrap="square" tIns="27432" bIns="27432"/>
+          <a:lstStyle/>
+          <a:p>
+            <a:pPr algn="l"/>
+            <a:r>
+              <a:rPr sz="1000" b="0" i="0">
+                <a:solidFill>
+                  <a:srgbClr val="1A1A1A"/>
+                </a:solidFill>
+                <a:latin typeface="Arial"/>
+              </a:rPr>
+              <a:t>AYUSH history too deep to finish</a:t>
+            </a:r>
+          </a:p>
+        </p:txBody>
+      </p:sp>
+      <p:sp>
+        <p:nvSpPr>
+          <p:cNvPr id="15389" name="Right Arrow 15388"/>
+          <p:cNvSpPr/>
+          <p:nvPr/>
+        </p:nvSpPr>
+        <p:spPr>
+          <a:xfrm>
+            <a:off x="2606040" y="5925312"/>
+            <a:ext cx="201168" cy="182880"/>
+          </a:xfrm>
+          <a:prstGeom prst="rightArrow">
+            <a:avLst/>
+          </a:prstGeom>
+          <a:solidFill>
+            <a:srgbClr val="9FB0C3"/>
+          </a:solidFill>
+          <a:ln>
+            <a:noFill/>
+          </a:ln>
+          <a:effectLst/>
+        </p:spPr>
+        <p:style>
+          <a:lnRef idx="1">
+            <a:schemeClr val="accent1"/>
+          </a:lnRef>
+          <a:fillRef idx="3">
+            <a:schemeClr val="accent1"/>
+          </a:fillRef>
+          <a:effectRef idx="2">
+            <a:schemeClr val="accent1"/>
+          </a:effectRef>
+          <a:fontRef idx="minor">
+            <a:schemeClr val="lt1"/>
+          </a:fontRef>
+        </p:style>
+        <p:txBody>
+          <a:bodyPr rtlCol="0" anchor="ctr" wrap="square" lIns="54864" rIns="54864" tIns="27432" bIns="27432"/>
+          <a:lstStyle/>
+          <a:p>
+            <a:pPr algn="ctr"/>
+          </a:p>
+        </p:txBody>
+      </p:sp>
+      <p:sp>
+        <p:nvSpPr>
+          <p:cNvPr id="15390" name="Rounded Rectangle 15389"/>
+          <p:cNvSpPr/>
+          <p:nvPr/>
+        </p:nvSpPr>
+        <p:spPr>
+          <a:xfrm>
+            <a:off x="2852928" y="5833872"/>
+            <a:ext cx="3520440" cy="365760"/>
+          </a:xfrm>
+          <a:prstGeom prst="roundRect">
+            <a:avLst>
+              <a:gd name="adj" fmla="val 15000"/>
+            </a:avLst>
+          </a:prstGeom>
+          <a:solidFill>
+            <a:srgbClr val="E6F4EC"/>
+          </a:solidFill>
+          <a:ln>
+            <a:noFill/>
+          </a:ln>
+          <a:effectLst/>
+        </p:spPr>
+        <p:style>
+          <a:lnRef idx="1">
+            <a:schemeClr val="accent1"/>
+          </a:lnRef>
+          <a:fillRef idx="3">
+            <a:schemeClr val="accent1"/>
+          </a:fillRef>
+          <a:effectRef idx="2">
+            <a:schemeClr val="accent1"/>
+          </a:effectRef>
+          <a:fontRef idx="minor">
+            <a:schemeClr val="lt1"/>
+          </a:fontRef>
+        </p:style>
+        <p:txBody>
+          <a:bodyPr rtlCol="0" anchor="ctr" wrap="square" tIns="27432" bIns="27432"/>
+          <a:lstStyle/>
+          <a:p>
+            <a:pPr algn="l"/>
+            <a:r>
+              <a:rPr sz="1000" b="0" i="0">
+                <a:solidFill>
+                  <a:srgbClr val="1A1A1A"/>
+                </a:solidFill>
+                <a:latin typeface="Arial"/>
+              </a:rPr>
+              <a:t>Dashavidha Pariksha interview mode</a:t>
+            </a:r>
+          </a:p>
+        </p:txBody>
+      </p:sp>
+      <p:sp>
+        <p:nvSpPr>
+          <p:cNvPr id="15391" name="TextBox 15390"/>
+          <p:cNvSpPr txBox="1"/>
+          <p:nvPr/>
+        </p:nvSpPr>
+        <p:spPr>
+          <a:xfrm>
+            <a:off x="6629400" y="3858768"/>
+            <a:ext cx="5212080" cy="274320"/>
+          </a:xfrm>
+          <a:prstGeom prst="rect">
+            <a:avLst/>
+          </a:prstGeom>
+          <a:noFill/>
+        </p:spPr>
+        <p:txBody>
+          <a:bodyPr wrap="square" lIns="36576" rIns="36576" tIns="18288" bIns="18288" anchor="ctr">
+            <a:spAutoFit/>
+          </a:bodyPr>
+          <a:lstStyle/>
+          <a:p>
+            <a:pPr algn="l"/>
+            <a:r>
+              <a:rPr sz="1000" b="0" i="0">
+                <a:solidFill>
+                  <a:srgbClr val="E8802A"/>
+                </a:solidFill>
+                <a:latin typeface="Arial"/>
+              </a:rPr>
+              <a:t>■ </a:t>
+            </a:r>
+            <a:r>
+              <a:rPr sz="1200" b="1" i="0">
+                <a:solidFill>
+                  <a:srgbClr val="1F497D"/>
+                </a:solidFill>
+                <a:latin typeface="Arial"/>
+              </a:rPr>
+              <a:t>Innovation and uniqueness of the solution</a:t>
+            </a:r>
+          </a:p>
+        </p:txBody>
+      </p:sp>
+      <p:sp>
+        <p:nvSpPr>
+          <p:cNvPr id="15392" name="TextBox 15391"/>
+          <p:cNvSpPr txBox="1"/>
+          <p:nvPr/>
+        </p:nvSpPr>
+        <p:spPr>
+          <a:xfrm>
+            <a:off x="6629400" y="4187952"/>
+            <a:ext cx="5212080" cy="2103120"/>
+          </a:xfrm>
+          <a:prstGeom prst="rect">
+            <a:avLst/>
+          </a:prstGeom>
+          <a:noFill/>
+        </p:spPr>
+        <p:txBody>
+          <a:bodyPr wrap="square" lIns="36576" rIns="36576" tIns="18288" bIns="18288" anchor="t">
+            <a:spAutoFit/>
+          </a:bodyPr>
+          <a:lstStyle/>
+          <a:p>
+            <a:pPr algn="l" marL="146304" indent="-146304">
+              <a:spcAft>
+                <a:spcPts val="600"/>
+              </a:spcAft>
+              <a:buClr>
+                <a:srgbClr val="E8802A"/>
+              </a:buClr>
+              <a:buFont typeface="Arial"/>
+              <a:buChar char="•"/>
+            </a:pPr>
+            <a:r>
+              <a:rPr sz="1100" b="0" i="0">
+                <a:solidFill>
+                  <a:srgbClr val="1A1A1A"/>
+                </a:solidFill>
+                <a:latin typeface="Arial"/>
+              </a:rPr>
+              <a:t>Patient-driven history + document digitisation in ONE flow – beyond admin check-in</a:t>
+            </a:r>
+          </a:p>
+          <a:p>
+            <a:pPr algn="l" marL="146304" indent="-146304">
+              <a:spcAft>
+                <a:spcPts val="600"/>
+              </a:spcAft>
+              <a:buClr>
+                <a:srgbClr val="E8802A"/>
+              </a:buClr>
+              <a:buFont typeface="Arial"/>
+              <a:buChar char="•"/>
+            </a:pPr>
+            <a:r>
+              <a:rPr sz="1100" b="0" i="0">
+                <a:solidFill>
+                  <a:srgbClr val="1A1A1A"/>
+                </a:solidFill>
+                <a:latin typeface="Arial"/>
+              </a:rPr>
+              <a:t>Safety path is rule-based: no LLM decides emergencies</a:t>
+            </a:r>
+          </a:p>
+          <a:p>
+            <a:pPr algn="l" marL="146304" indent="-146304">
+              <a:spcAft>
+                <a:spcPts val="600"/>
+              </a:spcAft>
+              <a:buClr>
+                <a:srgbClr val="E8802A"/>
+              </a:buClr>
+              <a:buFont typeface="Arial"/>
+              <a:buChar char="•"/>
+            </a:pPr>
+            <a:r>
+              <a:rPr sz="1100" b="0" i="0">
+                <a:solidFill>
+                  <a:srgbClr val="1A1A1A"/>
+                </a:solidFill>
+                <a:latin typeface="Arial"/>
+              </a:rPr>
+              <a:t>Every question answerable by voice OR touch – zero training</a:t>
+            </a:r>
+          </a:p>
+          <a:p>
+            <a:pPr algn="l" marL="146304" indent="-146304">
+              <a:spcAft>
+                <a:spcPts val="600"/>
+              </a:spcAft>
+              <a:buClr>
+                <a:srgbClr val="E8802A"/>
+              </a:buClr>
+              <a:buFont typeface="Arial"/>
+              <a:buChar char="•"/>
+            </a:pPr>
+            <a:r>
+              <a:rPr sz="1100" b="0" i="0">
+                <a:solidFill>
+                  <a:srgbClr val="1A1A1A"/>
+                </a:solidFill>
+                <a:latin typeface="Arial"/>
+              </a:rPr>
+              <a:t>Allopathic and AYUSH question trees in one engine</a:t>
+            </a:r>
+          </a:p>
+          <a:p>
+            <a:pPr algn="l" marL="146304" indent="-146304">
+              <a:spcAft>
+                <a:spcPts val="600"/>
+              </a:spcAft>
+              <a:buClr>
+                <a:srgbClr val="E8802A"/>
+              </a:buClr>
+              <a:buFont typeface="Arial"/>
+              <a:buChar char="•"/>
+            </a:pPr>
+            <a:r>
+              <a:rPr sz="1100" b="0" i="0">
+                <a:solidFill>
+                  <a:srgbClr val="1A1A1A"/>
+                </a:solidFill>
+                <a:latin typeface="Arial"/>
+              </a:rPr>
+              <a:t>Privacy-by-design: RFID card stores only a random ID; consent gates all data</a:t>
+            </a:r>
+          </a:p>
+          <a:p>
+            <a:pPr algn="l" marL="146304" indent="-146304">
+              <a:spcAft>
+                <a:spcPts val="600"/>
+              </a:spcAft>
+              <a:buClr>
+                <a:srgbClr val="E8802A"/>
+              </a:buClr>
+              <a:buFont typeface="Arial"/>
+              <a:buChar char="•"/>
+            </a:pPr>
+            <a:r>
+              <a:rPr sz="1100" b="0" i="0">
+                <a:solidFill>
+                  <a:srgbClr val="1A1A1A"/>
+                </a:solidFill>
+                <a:latin typeface="Arial"/>
+              </a:rPr>
+              <a:t>Same data feeds Rx-safety (NLEM 2022, Jan Aushadhi) and regional surveillance</a:t>
+            </a:r>
+          </a:p>
+        </p:txBody>
+      </p:sp>
+    </p:spTree>
+  </p:cSld>
+  <p:clrMapOvr>
+    <a:masterClrMapping/>
+  </p:clrMapOvr>
+</p:sld>
+</file>
+
+<file path=ppt/slides/slide3.xml><?xml version="1.0" encoding="utf-8"?>
+<p:sld xmlns:a="http://schemas.openxmlformats.org/drawingml/2006/main" xmlns:r="http://schemas.openxmlformats.org/officeDocument/2006/relationships" xmlns:p="http://schemas.openxmlformats.org/presentationml/2006/main">
+  <p:cSld>
+    <p:spTree>
+      <p:nvGrpSpPr>
+        <p:cNvPr id="1" name=""/>
+        <p:cNvGrpSpPr/>
+        <p:nvPr/>
+      </p:nvGrpSpPr>
+      <p:grpSpPr>
+        <a:xfrm>
+          <a:off x="0" y="0"/>
+          <a:ext cx="0" cy="0"/>
+          <a:chOff x="0" y="0"/>
+          <a:chExt cx="0" cy="0"/>
+        </a:xfrm>
+      </p:grpSpPr>
+      <p:sp>
+        <p:nvSpPr>
+          <p:cNvPr id="10" name="Rectangle 9">
+            <a:extLst>
+              <a:ext uri="{FF2B5EF4-FFF2-40B4-BE49-F238E27FC236}">
+                <a16:creationId xmlns:a16="http://schemas.microsoft.com/office/drawing/2014/main" id="{AD4F69D3-EEB0-4C4C-9434-B9960FB5854C}"/>
+              </a:ext>
+            </a:extLst>
+          </p:cNvPr>
+          <p:cNvSpPr>
+            <a:spLocks noChangeArrowheads="1"/>
+          </p:cNvSpPr>
+          <p:nvPr/>
+        </p:nvSpPr>
+        <p:spPr bwMode="auto">
+          <a:xfrm>
+            <a:off x="0" y="6354762"/>
+            <a:ext cx="12191999" cy="503238"/>
+          </a:xfrm>
+          <a:prstGeom prst="rect">
+            <a:avLst/>
+          </a:prstGeom>
+          <a:solidFill>
+            <a:srgbClr val="0070C0"/>
+          </a:solidFill>
+          <a:ln w="9525">
+            <a:noFill/>
+            <a:miter lim="800000"/>
+            <a:headEnd/>
+            <a:tailEnd/>
+          </a:ln>
+          <a:effectLst>
+            <a:outerShdw dist="23000" dir="5400000" rotWithShape="0">
+              <a:srgbClr val="808080">
+                <a:alpha val="34999"/>
+              </a:srgbClr>
+            </a:outerShdw>
+          </a:effectLst>
+        </p:spPr>
+        <p:txBody>
+          <a:bodyPr anchor="ctr"/>
+          <a:lstStyle/>
+          <a:p>
+            <a:pPr algn="ctr" fontAlgn="auto">
+              <a:spcBef>
+                <a:spcPts val="0"/>
+              </a:spcBef>
+              <a:spcAft>
+                <a:spcPts val="0"/>
+              </a:spcAft>
+              <a:defRPr/>
+            </a:pPr>
+            <a:endParaRPr lang="en-US" dirty="0">
+              <a:solidFill>
+                <a:schemeClr val="accent2">
+                  <a:lumMod val="75000"/>
+                </a:schemeClr>
+              </a:solidFill>
+              <a:latin typeface="+mn-lt"/>
+              <a:ea typeface="+mn-ea"/>
+            </a:endParaRPr>
+          </a:p>
+        </p:txBody>
+      </p:sp>
+      <p:sp>
+        <p:nvSpPr>
+          <p:cNvPr id="17409" name="Title 1"/>
+          <p:cNvSpPr>
+            <a:spLocks noGrp="1"/>
+          </p:cNvSpPr>
+          <p:nvPr>
+            <p:ph type="title"/>
+          </p:nvPr>
+        </p:nvSpPr>
+        <p:spPr/>
+        <p:txBody>
+          <a:bodyPr/>
+          <a:lstStyle/>
+          <a:p>
+            <a:pPr eaLnBrk="1" hangingPunct="1"/>
+            <a:r>
+              <a:rPr lang="en-US" sz="3600" b="1" dirty="0">
+                <a:latin typeface="Times New Roman" panose="02020603050405020304" pitchFamily="18" charset="0"/>
+                <a:ea typeface="ＭＳ Ｐゴシック" pitchFamily="1" charset="-128"/>
+                <a:cs typeface="Times New Roman" panose="02020603050405020304" pitchFamily="18" charset="0"/>
+              </a:rPr>
+              <a:t>TECHNICAL APPROACH</a:t>
+            </a:r>
+          </a:p>
+        </p:txBody>
+      </p:sp>
+      <p:sp>
+        <p:nvSpPr>
+          <p:cNvPr id="6" name="Slide Number Placeholder 5"/>
+          <p:cNvSpPr>
+            <a:spLocks noGrp="1"/>
+          </p:cNvSpPr>
+          <p:nvPr>
+            <p:ph type="sldNum" sz="quarter" idx="12"/>
+          </p:nvPr>
+        </p:nvSpPr>
+        <p:spPr/>
+        <p:txBody>
+          <a:bodyPr/>
+          <a:lstStyle/>
+          <a:p>
+            <a:fld id="{677C3CE7-23F7-4828-823C-E0205DF2CF97}" type="slidenum">
+              <a:rPr lang="en-US" b="1">
+                <a:solidFill>
+                  <a:schemeClr val="bg1"/>
+                </a:solidFill>
+              </a:rPr>
+              <a:pPr/>
+              <a:t>3</a:t>
+            </a:fld>
+            <a:endParaRPr lang="en-US" b="1" dirty="0">
+              <a:solidFill>
+                <a:schemeClr val="bg1"/>
+              </a:solidFill>
+            </a:endParaRPr>
+          </a:p>
+        </p:txBody>
+      </p:sp>
+      <p:sp>
+        <p:nvSpPr>
+          <p:cNvPr id="7" name="Footer Placeholder 6"/>
+          <p:cNvSpPr>
+            <a:spLocks noGrp="1"/>
+          </p:cNvSpPr>
+          <p:nvPr>
+            <p:ph type="ftr" sz="quarter" idx="11"/>
+          </p:nvPr>
+        </p:nvSpPr>
+        <p:spPr>
+          <a:xfrm>
+            <a:off x="4648200" y="6356353"/>
+            <a:ext cx="3204000" cy="365125"/>
+          </a:xfrm>
+        </p:spPr>
+        <p:txBody>
+          <a:bodyPr/>
+          <a:lstStyle/>
+          <a:p>
+            <a:pPr>
+              <a:defRPr/>
+            </a:pPr>
+            <a:r>
+              <a:rPr lang="en-US">
+                <a:solidFill>
+                  <a:schemeClr val="bg1"/>
+                </a:solidFill>
+              </a:rPr>
+              <a:t>@SIH Idea submission- Template</a:t>
+            </a:r>
+            <a:endParaRPr lang="en-US" dirty="0">
+              <a:solidFill>
+                <a:schemeClr val="bg1"/>
+              </a:solidFill>
+            </a:endParaRPr>
+          </a:p>
+        </p:txBody>
+      </p:sp>
+      <p:sp>
+        <p:nvSpPr>
+          <p:cNvPr id="11" name="Oval 10" descr="Your startup LOGO">
+            <a:extLst>
+              <a:ext uri="{FF2B5EF4-FFF2-40B4-BE49-F238E27FC236}">
+                <a16:creationId xmlns:a16="http://schemas.microsoft.com/office/drawing/2014/main" id="{5DBCE864-823D-4A13-9607-5DA1F0ED5FB8}"/>
+              </a:ext>
+              <a:ext uri="{C183D7F6-B498-43B3-948B-1728B52AA6E4}">
+                <adec:decorative xmlns:adec="http://schemas.microsoft.com/office/drawing/2017/decorative" val="0"/>
+              </a:ext>
+            </a:extLst>
+          </p:cNvPr>
+          <p:cNvSpPr/>
+          <p:nvPr/>
+        </p:nvSpPr>
+        <p:spPr>
+          <a:xfrm>
+            <a:off x="329773" y="252246"/>
+            <a:ext cx="1251857" cy="807334"/>
+          </a:xfrm>
+          <a:prstGeom prst="ellipse">
+            <a:avLst/>
+          </a:prstGeom>
+        </p:spPr>
+        <p:style>
+          <a:lnRef idx="2">
+            <a:schemeClr val="accent4"/>
+          </a:lnRef>
+          <a:fillRef idx="1">
+            <a:schemeClr val="lt1"/>
+          </a:fillRef>
+          <a:effectRef idx="0">
+            <a:schemeClr val="accent4"/>
+          </a:effectRef>
+          <a:fontRef idx="minor">
+            <a:schemeClr val="dk1"/>
+          </a:fontRef>
+        </p:style>
+        <p:txBody>
+          <a:bodyPr rtlCol="0" anchor="ctr"/>
+          <a:lstStyle/>
+          <a:p>
+            <a:pPr algn="ctr"/>
+            <a:r>
+              <a:rPr lang="en-US" dirty="0" sz="1500" b="1">
+                <a:solidFill>
+                  <a:srgbClr val="1F497D"/>
+                </a:solidFill>
+              </a:rPr>
+              <a:t>TrishulX</a:t>
+            </a:r>
+            <a:endParaRPr lang="en-IN" dirty="0"/>
           </a:p>
         </p:txBody>
       </p:sp>
@@ -6859,7 +8882,7 @@
           <a:noFill/>
         </p:spPr>
         <p:txBody>
-          <a:bodyPr wrap="square" lIns="36576" tIns="18288" rIns="36576" bIns="18288" anchor="ctr">
+          <a:bodyPr wrap="square" lIns="36576" rIns="36576" tIns="18288" bIns="18288" anchor="ctr">
             <a:spAutoFit/>
           </a:bodyPr>
           <a:lstStyle/>
@@ -6925,7 +8948,7 @@
           </a:fontRef>
         </p:style>
         <p:txBody>
-          <a:bodyPr wrap="square" lIns="36576" tIns="27432" rIns="36576" bIns="27432" rtlCol="0" anchor="ctr"/>
+          <a:bodyPr rtlCol="0" anchor="ctr" wrap="square" lIns="36576" rIns="36576" tIns="27432" bIns="27432"/>
           <a:lstStyle/>
           <a:p>
             <a:pPr algn="ctr"/>
@@ -6980,7 +9003,7 @@
           </a:fontRef>
         </p:style>
         <p:txBody>
-          <a:bodyPr wrap="square" lIns="73152" tIns="27432" rIns="73152" bIns="27432" rtlCol="0" anchor="ctr"/>
+          <a:bodyPr rtlCol="0" anchor="ctr" wrap="square" lIns="73152" rIns="73152" tIns="27432" bIns="27432"/>
           <a:lstStyle/>
           <a:p>
             <a:pPr algn="l"/>
@@ -7035,7 +9058,7 @@
           </a:fontRef>
         </p:style>
         <p:txBody>
-          <a:bodyPr wrap="square" lIns="36576" tIns="27432" rIns="36576" bIns="27432" rtlCol="0" anchor="ctr"/>
+          <a:bodyPr rtlCol="0" anchor="ctr" wrap="square" lIns="36576" rIns="36576" tIns="27432" bIns="27432"/>
           <a:lstStyle/>
           <a:p>
             <a:pPr algn="ctr"/>
@@ -7090,7 +9113,7 @@
           </a:fontRef>
         </p:style>
         <p:txBody>
-          <a:bodyPr wrap="square" lIns="73152" tIns="27432" rIns="73152" bIns="27432" rtlCol="0" anchor="ctr"/>
+          <a:bodyPr rtlCol="0" anchor="ctr" wrap="square" lIns="73152" rIns="73152" tIns="27432" bIns="27432"/>
           <a:lstStyle/>
           <a:p>
             <a:pPr algn="l"/>
@@ -7145,7 +9168,7 @@
           </a:fontRef>
         </p:style>
         <p:txBody>
-          <a:bodyPr wrap="square" lIns="36576" tIns="27432" rIns="36576" bIns="27432" rtlCol="0" anchor="ctr"/>
+          <a:bodyPr rtlCol="0" anchor="ctr" wrap="square" lIns="36576" rIns="36576" tIns="27432" bIns="27432"/>
           <a:lstStyle/>
           <a:p>
             <a:pPr algn="ctr"/>
@@ -7200,7 +9223,7 @@
           </a:fontRef>
         </p:style>
         <p:txBody>
-          <a:bodyPr wrap="square" lIns="73152" tIns="27432" rIns="73152" bIns="27432" rtlCol="0" anchor="ctr"/>
+          <a:bodyPr rtlCol="0" anchor="ctr" wrap="square" lIns="73152" rIns="73152" tIns="27432" bIns="27432"/>
           <a:lstStyle/>
           <a:p>
             <a:pPr algn="l"/>
@@ -7255,7 +9278,7 @@
           </a:fontRef>
         </p:style>
         <p:txBody>
-          <a:bodyPr wrap="square" lIns="36576" tIns="27432" rIns="36576" bIns="27432" rtlCol="0" anchor="ctr"/>
+          <a:bodyPr rtlCol="0" anchor="ctr" wrap="square" lIns="36576" rIns="36576" tIns="27432" bIns="27432"/>
           <a:lstStyle/>
           <a:p>
             <a:pPr algn="ctr"/>
@@ -7310,7 +9333,7 @@
           </a:fontRef>
         </p:style>
         <p:txBody>
-          <a:bodyPr wrap="square" lIns="73152" tIns="27432" rIns="73152" bIns="27432" rtlCol="0" anchor="ctr"/>
+          <a:bodyPr rtlCol="0" anchor="ctr" wrap="square" lIns="73152" rIns="73152" tIns="27432" bIns="27432"/>
           <a:lstStyle/>
           <a:p>
             <a:pPr algn="l"/>
@@ -7365,7 +9388,7 @@
           </a:fontRef>
         </p:style>
         <p:txBody>
-          <a:bodyPr wrap="square" lIns="36576" tIns="27432" rIns="36576" bIns="27432" rtlCol="0" anchor="ctr"/>
+          <a:bodyPr rtlCol="0" anchor="ctr" wrap="square" lIns="36576" rIns="36576" tIns="27432" bIns="27432"/>
           <a:lstStyle/>
           <a:p>
             <a:pPr algn="ctr"/>
@@ -7420,7 +9443,7 @@
           </a:fontRef>
         </p:style>
         <p:txBody>
-          <a:bodyPr wrap="square" lIns="73152" tIns="27432" rIns="73152" bIns="27432" rtlCol="0" anchor="ctr"/>
+          <a:bodyPr rtlCol="0" anchor="ctr" wrap="square" lIns="73152" rIns="73152" tIns="27432" bIns="27432"/>
           <a:lstStyle/>
           <a:p>
             <a:pPr algn="l"/>
@@ -7475,7 +9498,7 @@
           </a:fontRef>
         </p:style>
         <p:txBody>
-          <a:bodyPr wrap="square" lIns="36576" tIns="27432" rIns="36576" bIns="27432" rtlCol="0" anchor="ctr"/>
+          <a:bodyPr rtlCol="0" anchor="ctr" wrap="square" lIns="36576" rIns="36576" tIns="27432" bIns="27432"/>
           <a:lstStyle/>
           <a:p>
             <a:pPr algn="ctr"/>
@@ -7530,7 +9553,7 @@
           </a:fontRef>
         </p:style>
         <p:txBody>
-          <a:bodyPr wrap="square" lIns="73152" tIns="27432" rIns="73152" bIns="27432" rtlCol="0" anchor="ctr"/>
+          <a:bodyPr rtlCol="0" anchor="ctr" wrap="square" lIns="73152" rIns="73152" tIns="27432" bIns="27432"/>
           <a:lstStyle/>
           <a:p>
             <a:pPr algn="l"/>
@@ -7585,7 +9608,7 @@
           </a:fontRef>
         </p:style>
         <p:txBody>
-          <a:bodyPr wrap="square" lIns="36576" tIns="27432" rIns="36576" bIns="27432" rtlCol="0" anchor="ctr"/>
+          <a:bodyPr rtlCol="0" anchor="ctr" wrap="square" lIns="36576" rIns="36576" tIns="27432" bIns="27432"/>
           <a:lstStyle/>
           <a:p>
             <a:pPr algn="ctr"/>
@@ -7640,7 +9663,7 @@
           </a:fontRef>
         </p:style>
         <p:txBody>
-          <a:bodyPr wrap="square" lIns="73152" tIns="27432" rIns="73152" bIns="27432" rtlCol="0" anchor="ctr"/>
+          <a:bodyPr rtlCol="0" anchor="ctr" wrap="square" lIns="73152" rIns="73152" tIns="27432" bIns="27432"/>
           <a:lstStyle/>
           <a:p>
             <a:pPr algn="l"/>
@@ -7673,7 +9696,7 @@
           <a:noFill/>
         </p:spPr>
         <p:txBody>
-          <a:bodyPr wrap="square" lIns="36576" tIns="18288" rIns="36576" bIns="18288" anchor="ctr">
+          <a:bodyPr wrap="square" lIns="36576" rIns="36576" tIns="18288" bIns="18288" anchor="ctr">
             <a:spAutoFit/>
           </a:bodyPr>
           <a:lstStyle/>
@@ -7741,7 +9764,7 @@
           </a:fontRef>
         </p:style>
         <p:txBody>
-          <a:bodyPr wrap="square" lIns="54864" tIns="27432" rIns="54864" bIns="27432" rtlCol="0" anchor="ctr"/>
+          <a:bodyPr rtlCol="0" anchor="ctr" wrap="square" lIns="54864" rIns="54864" tIns="27432" bIns="27432"/>
           <a:lstStyle/>
           <a:p>
             <a:pPr algn="ctr"/>
@@ -7798,7 +9821,7 @@
           </a:fontRef>
         </p:style>
         <p:txBody>
-          <a:bodyPr wrap="square" lIns="54864" tIns="27432" rIns="54864" bIns="27432" rtlCol="0" anchor="ctr"/>
+          <a:bodyPr rtlCol="0" anchor="ctr" wrap="square" lIns="54864" rIns="54864" tIns="27432" bIns="27432"/>
           <a:lstStyle/>
           <a:p>
             <a:pPr algn="ctr"/>
@@ -7855,7 +9878,7 @@
           </a:fontRef>
         </p:style>
         <p:txBody>
-          <a:bodyPr wrap="square" lIns="54864" tIns="27432" rIns="54864" bIns="27432" rtlCol="0" anchor="ctr"/>
+          <a:bodyPr rtlCol="0" anchor="ctr" wrap="square" lIns="54864" rIns="54864" tIns="27432" bIns="27432"/>
           <a:lstStyle/>
           <a:p>
             <a:pPr algn="ctr"/>
@@ -7912,7 +9935,7 @@
           </a:fontRef>
         </p:style>
         <p:txBody>
-          <a:bodyPr wrap="square" lIns="54864" tIns="27432" rIns="54864" bIns="27432" rtlCol="0" anchor="ctr"/>
+          <a:bodyPr rtlCol="0" anchor="ctr" wrap="square" lIns="54864" rIns="54864" tIns="27432" bIns="27432"/>
           <a:lstStyle/>
           <a:p>
             <a:pPr algn="ctr"/>
@@ -7965,11 +9988,10 @@
           </a:fontRef>
         </p:style>
         <p:txBody>
-          <a:bodyPr wrap="square" lIns="54864" tIns="27432" rIns="54864" bIns="27432" rtlCol="0" anchor="ctr"/>
+          <a:bodyPr rtlCol="0" anchor="ctr" wrap="square" lIns="54864" rIns="54864" tIns="27432" bIns="27432"/>
           <a:lstStyle/>
           <a:p>
             <a:pPr algn="ctr"/>
-            <a:endParaRPr/>
           </a:p>
         </p:txBody>
       </p:sp>
@@ -8012,7 +10034,7 @@
           </a:fontRef>
         </p:style>
         <p:txBody>
-          <a:bodyPr wrap="square" lIns="54864" tIns="27432" rIns="54864" bIns="27432" rtlCol="0" anchor="ctr"/>
+          <a:bodyPr rtlCol="0" anchor="ctr" wrap="square" lIns="54864" rIns="54864" tIns="27432" bIns="27432"/>
           <a:lstStyle/>
           <a:p>
             <a:pPr algn="ctr">
@@ -8082,11 +10104,10 @@
           </a:fontRef>
         </p:style>
         <p:txBody>
-          <a:bodyPr wrap="square" lIns="54864" tIns="27432" rIns="54864" bIns="27432" rtlCol="0" anchor="ctr"/>
+          <a:bodyPr rtlCol="0" anchor="ctr" wrap="square" lIns="54864" rIns="54864" tIns="27432" bIns="27432"/>
           <a:lstStyle/>
           <a:p>
             <a:pPr algn="ctr"/>
-            <a:endParaRPr/>
           </a:p>
         </p:txBody>
       </p:sp>
@@ -8129,7 +10150,7 @@
           </a:fontRef>
         </p:style>
         <p:txBody>
-          <a:bodyPr wrap="square" lIns="54864" tIns="27432" rIns="54864" bIns="27432" rtlCol="0" anchor="ctr"/>
+          <a:bodyPr rtlCol="0" anchor="ctr" wrap="square" lIns="54864" rIns="54864" tIns="27432" bIns="27432"/>
           <a:lstStyle/>
           <a:p>
             <a:pPr algn="ctr">
@@ -8199,11 +10220,10 @@
           </a:fontRef>
         </p:style>
         <p:txBody>
-          <a:bodyPr wrap="square" lIns="54864" tIns="27432" rIns="54864" bIns="27432" rtlCol="0" anchor="ctr"/>
+          <a:bodyPr rtlCol="0" anchor="ctr" wrap="square" lIns="54864" rIns="54864" tIns="27432" bIns="27432"/>
           <a:lstStyle/>
           <a:p>
             <a:pPr algn="ctr"/>
-            <a:endParaRPr/>
           </a:p>
         </p:txBody>
       </p:sp>
@@ -8248,7 +10268,7 @@
           </a:fontRef>
         </p:style>
         <p:txBody>
-          <a:bodyPr wrap="square" lIns="36576" tIns="27432" rIns="36576" bIns="27432" rtlCol="0" anchor="ctr"/>
+          <a:bodyPr rtlCol="0" anchor="ctr" wrap="square" lIns="36576" rIns="36576" tIns="27432" bIns="27432"/>
           <a:lstStyle/>
           <a:p>
             <a:pPr algn="ctr"/>
@@ -8317,7 +10337,7 @@
           </a:fontRef>
         </p:style>
         <p:txBody>
-          <a:bodyPr wrap="square" lIns="36576" tIns="27432" rIns="36576" bIns="27432" rtlCol="0" anchor="ctr"/>
+          <a:bodyPr rtlCol="0" anchor="ctr" wrap="square" lIns="36576" rIns="36576" tIns="27432" bIns="27432"/>
           <a:lstStyle/>
           <a:p>
             <a:pPr algn="ctr"/>
@@ -8386,7 +10406,7 @@
           </a:fontRef>
         </p:style>
         <p:txBody>
-          <a:bodyPr wrap="square" lIns="36576" tIns="27432" rIns="36576" bIns="27432" rtlCol="0" anchor="ctr"/>
+          <a:bodyPr rtlCol="0" anchor="ctr" wrap="square" lIns="36576" rIns="36576" tIns="27432" bIns="27432"/>
           <a:lstStyle/>
           <a:p>
             <a:pPr algn="ctr"/>
@@ -8455,7 +10475,7 @@
           </a:fontRef>
         </p:style>
         <p:txBody>
-          <a:bodyPr wrap="square" lIns="54864" tIns="27432" rIns="54864" bIns="27432" rtlCol="0" anchor="ctr"/>
+          <a:bodyPr rtlCol="0" anchor="ctr" wrap="square" lIns="54864" rIns="54864" tIns="27432" bIns="27432"/>
           <a:lstStyle/>
           <a:p>
             <a:pPr algn="ctr"/>
@@ -8517,11 +10537,10 @@
           </a:fontRef>
         </p:style>
         <p:txBody>
-          <a:bodyPr wrap="square" lIns="54864" tIns="27432" rIns="54864" bIns="27432" rtlCol="0" anchor="ctr"/>
+          <a:bodyPr rtlCol="0" anchor="ctr" wrap="square" lIns="54864" rIns="54864" tIns="27432" bIns="27432"/>
           <a:lstStyle/>
           <a:p>
             <a:pPr algn="ctr"/>
-            <a:endParaRPr/>
           </a:p>
         </p:txBody>
       </p:sp>
@@ -8564,7 +10583,7 @@
           </a:fontRef>
         </p:style>
         <p:txBody>
-          <a:bodyPr wrap="square" lIns="54864" tIns="27432" rIns="54864" bIns="27432" rtlCol="0" anchor="ctr"/>
+          <a:bodyPr rtlCol="0" anchor="ctr" wrap="square" lIns="54864" rIns="54864" tIns="27432" bIns="27432"/>
           <a:lstStyle/>
           <a:p>
             <a:pPr algn="ctr"/>
@@ -8626,11 +10645,10 @@
           </a:fontRef>
         </p:style>
         <p:txBody>
-          <a:bodyPr wrap="square" lIns="54864" tIns="27432" rIns="54864" bIns="27432" rtlCol="0" anchor="ctr"/>
+          <a:bodyPr rtlCol="0" anchor="ctr" wrap="square" lIns="54864" rIns="54864" tIns="27432" bIns="27432"/>
           <a:lstStyle/>
           <a:p>
             <a:pPr algn="ctr"/>
-            <a:endParaRPr/>
           </a:p>
         </p:txBody>
       </p:sp>
@@ -8675,7 +10693,7 @@
           </a:fontRef>
         </p:style>
         <p:txBody>
-          <a:bodyPr wrap="square" lIns="45720" tIns="27432" rIns="45720" bIns="27432" rtlCol="0" anchor="ctr"/>
+          <a:bodyPr rtlCol="0" anchor="ctr" wrap="square" lIns="45720" rIns="45720" tIns="27432" bIns="27432"/>
           <a:lstStyle/>
           <a:p>
             <a:pPr algn="ctr">
@@ -8748,7 +10766,7 @@
           </a:fontRef>
         </p:style>
         <p:txBody>
-          <a:bodyPr wrap="square" lIns="45720" tIns="27432" rIns="45720" bIns="27432" rtlCol="0" anchor="ctr"/>
+          <a:bodyPr rtlCol="0" anchor="ctr" wrap="square" lIns="45720" rIns="45720" tIns="27432" bIns="27432"/>
           <a:lstStyle/>
           <a:p>
             <a:pPr algn="ctr">
@@ -8821,7 +10839,7 @@
           </a:fontRef>
         </p:style>
         <p:txBody>
-          <a:bodyPr wrap="square" lIns="45720" tIns="27432" rIns="45720" bIns="27432" rtlCol="0" anchor="ctr"/>
+          <a:bodyPr rtlCol="0" anchor="ctr" wrap="square" lIns="45720" rIns="45720" tIns="27432" bIns="27432"/>
           <a:lstStyle/>
           <a:p>
             <a:pPr algn="ctr">
@@ -8894,7 +10912,7 @@
           </a:fontRef>
         </p:style>
         <p:txBody>
-          <a:bodyPr wrap="square" lIns="45720" tIns="27432" rIns="45720" bIns="27432" rtlCol="0" anchor="ctr"/>
+          <a:bodyPr rtlCol="0" anchor="ctr" wrap="square" lIns="45720" rIns="45720" tIns="27432" bIns="27432"/>
           <a:lstStyle/>
           <a:p>
             <a:pPr algn="ctr">
@@ -8967,7 +10985,7 @@
           </a:fontRef>
         </p:style>
         <p:txBody>
-          <a:bodyPr wrap="square" lIns="36576" tIns="27432" rIns="36576" bIns="27432" rtlCol="0" anchor="ctr"/>
+          <a:bodyPr rtlCol="0" anchor="ctr" wrap="square" lIns="36576" rIns="36576" tIns="27432" bIns="27432"/>
           <a:lstStyle/>
           <a:p>
             <a:pPr algn="ctr"/>
@@ -9036,7 +11054,7 @@
           </a:fontRef>
         </p:style>
         <p:txBody>
-          <a:bodyPr wrap="square" lIns="36576" tIns="27432" rIns="36576" bIns="27432" rtlCol="0" anchor="ctr"/>
+          <a:bodyPr rtlCol="0" anchor="ctr" wrap="square" lIns="36576" rIns="36576" tIns="27432" bIns="27432"/>
           <a:lstStyle/>
           <a:p>
             <a:pPr algn="ctr"/>
@@ -9105,7 +11123,7 @@
           </a:fontRef>
         </p:style>
         <p:txBody>
-          <a:bodyPr wrap="square" lIns="36576" tIns="27432" rIns="36576" bIns="27432" rtlCol="0" anchor="ctr"/>
+          <a:bodyPr rtlCol="0" anchor="ctr" wrap="square" lIns="36576" rIns="36576" tIns="27432" bIns="27432"/>
           <a:lstStyle/>
           <a:p>
             <a:pPr algn="ctr"/>
@@ -9174,7 +11192,7 @@
           </a:fontRef>
         </p:style>
         <p:txBody>
-          <a:bodyPr wrap="square" lIns="36576" tIns="27432" rIns="36576" bIns="27432" rtlCol="0" anchor="ctr"/>
+          <a:bodyPr rtlCol="0" anchor="ctr" wrap="square" lIns="36576" rIns="36576" tIns="27432" bIns="27432"/>
           <a:lstStyle/>
           <a:p>
             <a:pPr algn="ctr"/>
@@ -9210,7 +11228,7 @@
 </p:sld>
 </file>
 
-<file path=ppt/slides/slide3.xml><?xml version="1.0" encoding="utf-8"?>
+<file path=ppt/slides/slide4.xml><?xml version="1.0" encoding="utf-8"?>
 <p:sld xmlns:a="http://schemas.openxmlformats.org/drawingml/2006/main" xmlns:r="http://schemas.openxmlformats.org/officeDocument/2006/relationships" xmlns:p="http://schemas.openxmlformats.org/presentationml/2006/main">
   <p:cSld>
     <p:spTree>
@@ -9397,7 +11415,7 @@
                 <a:tabLst/>
                 <a:defRPr/>
               </a:pPr>
-              <a:t>3</a:t>
+              <a:t>4</a:t>
             </a:fld>
             <a:endParaRPr kumimoji="0" lang="en-US" sz="1200" b="1" i="0" u="none" strike="noStrike" kern="1200" cap="none" spc="0" normalizeH="0" baseline="0" noProof="0" dirty="0">
               <a:ln>
@@ -9453,6 +11471,23 @@
               <a:tabLst/>
               <a:defRPr/>
             </a:pPr>
+            <a:r>
+              <a:rPr kumimoji="0" lang="en-US" sz="1200" b="0" i="0" u="none" strike="noStrike" kern="1200" cap="none" spc="0" normalizeH="0" baseline="0" noProof="0">
+                <a:ln>
+                  <a:noFill/>
+                </a:ln>
+                <a:solidFill>
+                  <a:prstClr val="white"/>
+                </a:solidFill>
+                <a:effectLst/>
+                <a:uLnTx/>
+                <a:uFillTx/>
+                <a:latin typeface="TradeGothic"/>
+                <a:ea typeface="+mn-ea"/>
+                <a:cs typeface="+mn-cs"/>
+              </a:rPr>
+              <a:t>@SIH Idea submission- Template</a:t>
+            </a:r>
             <a:endParaRPr kumimoji="0" lang="en-US" sz="1200" b="0" i="0" u="none" strike="noStrike" kern="1200" cap="none" spc="0" normalizeH="0" baseline="0" noProof="0" dirty="0">
               <a:ln>
                 <a:noFill/>
@@ -9514,14 +11549,14 @@
           <a:p>
             <a:pPr algn="ctr"/>
             <a:r>
-              <a:rPr lang="en-US" sz="1100" b="1" dirty="0" err="1">
+              <a:rPr lang="en-US" dirty="0" sz="1500" b="1">
                 <a:solidFill>
                   <a:srgbClr val="1F497D"/>
                 </a:solidFill>
               </a:rPr>
-              <a:t>CodeBloom</a:t>
-            </a:r>
-            <a:endParaRPr lang="en-IN" sz="1100" dirty="0"/>
+              <a:t>TrishulX</a:t>
+            </a:r>
+            <a:endParaRPr lang="en-IN" dirty="0"/>
           </a:p>
         </p:txBody>
       </p:sp>
@@ -9572,7 +11607,7 @@
           <a:noFill/>
         </p:spPr>
         <p:txBody>
-          <a:bodyPr wrap="square" lIns="36576" tIns="18288" rIns="36576" bIns="18288" anchor="ctr">
+          <a:bodyPr wrap="square" lIns="36576" rIns="36576" tIns="18288" bIns="18288" anchor="ctr">
             <a:spAutoFit/>
           </a:bodyPr>
           <a:lstStyle/>
@@ -9616,7 +11651,7 @@
           <a:noFill/>
         </p:spPr>
         <p:txBody>
-          <a:bodyPr wrap="square" lIns="36576" tIns="18288" rIns="36576" bIns="18288" anchor="t">
+          <a:bodyPr wrap="square" lIns="36576" rIns="36576" tIns="18288" bIns="18288" anchor="t">
             <a:spAutoFit/>
           </a:bodyPr>
           <a:lstStyle/>
@@ -9648,7 +11683,7 @@
         </p:xfrm>
         <a:graphic>
           <a:graphicData uri="http://schemas.openxmlformats.org/drawingml/2006/chart">
-            <c:chart xmlns:c="http://schemas.openxmlformats.org/drawingml/2006/chart" xmlns:r="http://schemas.openxmlformats.org/officeDocument/2006/relationships" r:id="rId4"/>
+            <c:chart xmlns:c="http://schemas.openxmlformats.org/drawingml/2006/chart" r:id="rId4"/>
           </a:graphicData>
         </a:graphic>
       </p:graphicFrame>
@@ -9669,12 +11704,12 @@
           <a:noFill/>
         </p:spPr>
         <p:txBody>
-          <a:bodyPr wrap="square" lIns="36576" tIns="18288" rIns="36576" bIns="18288" anchor="t">
+          <a:bodyPr wrap="square" lIns="36576" rIns="36576" tIns="18288" bIns="18288" anchor="t">
             <a:spAutoFit/>
           </a:bodyPr>
           <a:lstStyle/>
           <a:p>
-            <a:pPr marL="146304" indent="-146304" algn="l">
+            <a:pPr algn="l" marL="146304" indent="-146304">
               <a:spcAft>
                 <a:spcPts val="400"/>
               </a:spcAft>
@@ -9695,7 +11730,7 @@
             </a:r>
           </a:p>
           <a:p>
-            <a:pPr marL="146304" indent="-146304" algn="l">
+            <a:pPr algn="l" marL="146304" indent="-146304">
               <a:spcAft>
                 <a:spcPts val="400"/>
               </a:spcAft>
@@ -9716,7 +11751,7 @@
             </a:r>
           </a:p>
           <a:p>
-            <a:pPr marL="146304" indent="-146304" algn="l">
+            <a:pPr algn="l" marL="146304" indent="-146304">
               <a:spcAft>
                 <a:spcPts val="400"/>
               </a:spcAft>
@@ -9737,7 +11772,7 @@
             </a:r>
           </a:p>
           <a:p>
-            <a:pPr marL="146304" indent="-146304" algn="l">
+            <a:pPr algn="l" marL="146304" indent="-146304">
               <a:spcAft>
                 <a:spcPts val="400"/>
               </a:spcAft>
@@ -9778,25 +11813,13 @@
                 <a:tableStyleId>{5C22544A-7EE6-4342-B048-85BDC9FD1C3A}</a:tableStyleId>
               </a:tblPr>
               <a:tblGrid>
-                <a:gridCol w="2240280">
-                  <a:extLst>
-                    <a:ext uri="{9D8B030D-6E8A-4147-A177-3AD203B41FA5}">
-                      <a16:colId xmlns:a16="http://schemas.microsoft.com/office/drawing/2014/main" val="20000"/>
-                    </a:ext>
-                  </a:extLst>
-                </a:gridCol>
-                <a:gridCol w="3502152">
-                  <a:extLst>
-                    <a:ext uri="{9D8B030D-6E8A-4147-A177-3AD203B41FA5}">
-                      <a16:colId xmlns:a16="http://schemas.microsoft.com/office/drawing/2014/main" val="20001"/>
-                    </a:ext>
-                  </a:extLst>
-                </a:gridCol>
+                <a:gridCol w="2240280"/>
+                <a:gridCol w="3502152"/>
               </a:tblGrid>
               <a:tr h="411480">
                 <a:tc>
                   <a:txBody>
-                    <a:bodyPr/>
+                    <a:bodyPr wrap="square"/>
                     <a:lstStyle/>
                     <a:p>
                       <a:pPr algn="l"/>
@@ -9819,7 +11842,7 @@
                 </a:tc>
                 <a:tc>
                   <a:txBody>
-                    <a:bodyPr/>
+                    <a:bodyPr wrap="square"/>
                     <a:lstStyle/>
                     <a:p>
                       <a:pPr algn="l"/>
@@ -9840,16 +11863,11 @@
                     </a:solidFill>
                   </a:tcPr>
                 </a:tc>
-                <a:extLst>
-                  <a:ext uri="{0D108BD9-81ED-4DB2-BD59-A6C34878D82A}">
-                    <a16:rowId xmlns:a16="http://schemas.microsoft.com/office/drawing/2014/main" val="10000"/>
-                  </a:ext>
-                </a:extLst>
               </a:tr>
               <a:tr h="603504">
                 <a:tc>
                   <a:txBody>
-                    <a:bodyPr/>
+                    <a:bodyPr wrap="square"/>
                     <a:lstStyle/>
                     <a:p>
                       <a:pPr algn="l"/>
@@ -9872,7 +11890,7 @@
                 </a:tc>
                 <a:tc>
                   <a:txBody>
-                    <a:bodyPr/>
+                    <a:bodyPr wrap="square"/>
                     <a:lstStyle/>
                     <a:p>
                       <a:pPr algn="l"/>
@@ -9893,16 +11911,11 @@
                     </a:solidFill>
                   </a:tcPr>
                 </a:tc>
-                <a:extLst>
-                  <a:ext uri="{0D108BD9-81ED-4DB2-BD59-A6C34878D82A}">
-                    <a16:rowId xmlns:a16="http://schemas.microsoft.com/office/drawing/2014/main" val="10001"/>
-                  </a:ext>
-                </a:extLst>
               </a:tr>
               <a:tr h="603504">
                 <a:tc>
                   <a:txBody>
-                    <a:bodyPr/>
+                    <a:bodyPr wrap="square"/>
                     <a:lstStyle/>
                     <a:p>
                       <a:pPr algn="l"/>
@@ -9925,7 +11938,7 @@
                 </a:tc>
                 <a:tc>
                   <a:txBody>
-                    <a:bodyPr/>
+                    <a:bodyPr wrap="square"/>
                     <a:lstStyle/>
                     <a:p>
                       <a:pPr algn="l"/>
@@ -9946,16 +11959,11 @@
                     </a:solidFill>
                   </a:tcPr>
                 </a:tc>
-                <a:extLst>
-                  <a:ext uri="{0D108BD9-81ED-4DB2-BD59-A6C34878D82A}">
-                    <a16:rowId xmlns:a16="http://schemas.microsoft.com/office/drawing/2014/main" val="10002"/>
-                  </a:ext>
-                </a:extLst>
               </a:tr>
               <a:tr h="603504">
                 <a:tc>
                   <a:txBody>
-                    <a:bodyPr/>
+                    <a:bodyPr wrap="square"/>
                     <a:lstStyle/>
                     <a:p>
                       <a:pPr algn="l"/>
@@ -9978,7 +11986,7 @@
                 </a:tc>
                 <a:tc>
                   <a:txBody>
-                    <a:bodyPr/>
+                    <a:bodyPr wrap="square"/>
                     <a:lstStyle/>
                     <a:p>
                       <a:pPr algn="l"/>
@@ -9989,7 +11997,7 @@
                           </a:solidFill>
                           <a:latin typeface="Arial"/>
                         </a:rPr>
-                        <a:t>Consent-first flow, audit log, no health data on RFID card, role-based access, idle timeout</a:t>
+                        <a:t>Consent-first flow, audit log, no health data on RFID card, role-based doctor login, idle timeout</a:t>
                       </a:r>
                     </a:p>
                   </a:txBody>
@@ -9999,16 +12007,11 @@
                     </a:solidFill>
                   </a:tcPr>
                 </a:tc>
-                <a:extLst>
-                  <a:ext uri="{0D108BD9-81ED-4DB2-BD59-A6C34878D82A}">
-                    <a16:rowId xmlns:a16="http://schemas.microsoft.com/office/drawing/2014/main" val="10003"/>
-                  </a:ext>
-                </a:extLst>
               </a:tr>
               <a:tr h="603504">
                 <a:tc>
                   <a:txBody>
-                    <a:bodyPr/>
+                    <a:bodyPr wrap="square"/>
                     <a:lstStyle/>
                     <a:p>
                       <a:pPr algn="l"/>
@@ -10031,7 +12034,7 @@
                 </a:tc>
                 <a:tc>
                   <a:txBody>
-                    <a:bodyPr/>
+                    <a:bodyPr wrap="square"/>
                     <a:lstStyle/>
                     <a:p>
                       <a:pPr algn="l"/>
@@ -10052,16 +12055,11 @@
                     </a:solidFill>
                   </a:tcPr>
                 </a:tc>
-                <a:extLst>
-                  <a:ext uri="{0D108BD9-81ED-4DB2-BD59-A6C34878D82A}">
-                    <a16:rowId xmlns:a16="http://schemas.microsoft.com/office/drawing/2014/main" val="10004"/>
-                  </a:ext>
-                </a:extLst>
               </a:tr>
               <a:tr h="603504">
                 <a:tc>
                   <a:txBody>
-                    <a:bodyPr/>
+                    <a:bodyPr wrap="square"/>
                     <a:lstStyle/>
                     <a:p>
                       <a:pPr algn="l"/>
@@ -10084,7 +12082,7 @@
                 </a:tc>
                 <a:tc>
                   <a:txBody>
-                    <a:bodyPr/>
+                    <a:bodyPr wrap="square"/>
                     <a:lstStyle/>
                     <a:p>
                       <a:pPr algn="l"/>
@@ -10105,11 +12103,6 @@
                     </a:solidFill>
                   </a:tcPr>
                 </a:tc>
-                <a:extLst>
-                  <a:ext uri="{0D108BD9-81ED-4DB2-BD59-A6C34878D82A}">
-                    <a16:rowId xmlns:a16="http://schemas.microsoft.com/office/drawing/2014/main" val="10005"/>
-                  </a:ext>
-                </a:extLst>
               </a:tr>
             </a:tbl>
           </a:graphicData>
@@ -10132,7 +12125,7 @@
           <a:noFill/>
         </p:spPr>
         <p:txBody>
-          <a:bodyPr wrap="square" lIns="36576" tIns="18288" rIns="36576" bIns="18288" anchor="t">
+          <a:bodyPr wrap="square" lIns="36576" rIns="36576" tIns="18288" bIns="18288" anchor="t">
             <a:spAutoFit/>
           </a:bodyPr>
           <a:lstStyle/>
@@ -10187,7 +12180,7 @@
           </a:fontRef>
         </p:style>
         <p:txBody>
-          <a:bodyPr wrap="square" lIns="73152" tIns="27432" rIns="73152" bIns="27432" rtlCol="0" anchor="ctr"/>
+          <a:bodyPr rtlCol="0" anchor="ctr" wrap="square" lIns="73152" rIns="73152" tIns="27432" bIns="27432"/>
           <a:lstStyle/>
           <a:p>
             <a:pPr algn="l"/>
@@ -10242,7 +12235,7 @@
           </a:fontRef>
         </p:style>
         <p:txBody>
-          <a:bodyPr wrap="square" lIns="64008" tIns="27432" rIns="64008" bIns="27432" rtlCol="0" anchor="t"/>
+          <a:bodyPr rtlCol="0" anchor="t" wrap="square" lIns="64008" rIns="64008" tIns="27432" bIns="27432"/>
           <a:lstStyle/>
           <a:p>
             <a:pPr algn="l"/>
@@ -10295,7 +12288,7 @@
           </a:fontRef>
         </p:style>
         <p:txBody>
-          <a:bodyPr wrap="square" lIns="73152" tIns="27432" rIns="73152" bIns="27432" rtlCol="0" anchor="ctr"/>
+          <a:bodyPr rtlCol="0" anchor="ctr" wrap="square" lIns="73152" rIns="73152" tIns="27432" bIns="27432"/>
           <a:lstStyle/>
           <a:p>
             <a:pPr algn="l"/>
@@ -10350,7 +12343,7 @@
           </a:fontRef>
         </p:style>
         <p:txBody>
-          <a:bodyPr wrap="square" lIns="64008" tIns="27432" rIns="64008" bIns="27432" rtlCol="0" anchor="t"/>
+          <a:bodyPr rtlCol="0" anchor="t" wrap="square" lIns="64008" rIns="64008" tIns="27432" bIns="27432"/>
           <a:lstStyle/>
           <a:p>
             <a:pPr algn="l"/>
@@ -10403,7 +12396,7 @@
           </a:fontRef>
         </p:style>
         <p:txBody>
-          <a:bodyPr wrap="square" lIns="73152" tIns="27432" rIns="73152" bIns="27432" rtlCol="0" anchor="ctr"/>
+          <a:bodyPr rtlCol="0" anchor="ctr" wrap="square" lIns="73152" rIns="73152" tIns="27432" bIns="27432"/>
           <a:lstStyle/>
           <a:p>
             <a:pPr algn="l"/>
@@ -10458,7 +12451,7 @@
           </a:fontRef>
         </p:style>
         <p:txBody>
-          <a:bodyPr wrap="square" lIns="64008" tIns="27432" rIns="64008" bIns="27432" rtlCol="0" anchor="t"/>
+          <a:bodyPr rtlCol="0" anchor="t" wrap="square" lIns="64008" rIns="64008" tIns="27432" bIns="27432"/>
           <a:lstStyle/>
           <a:p>
             <a:pPr algn="l"/>
@@ -10511,7 +12504,7 @@
           </a:fontRef>
         </p:style>
         <p:txBody>
-          <a:bodyPr wrap="square" lIns="73152" tIns="27432" rIns="73152" bIns="27432" rtlCol="0" anchor="ctr"/>
+          <a:bodyPr rtlCol="0" anchor="ctr" wrap="square" lIns="73152" rIns="73152" tIns="27432" bIns="27432"/>
           <a:lstStyle/>
           <a:p>
             <a:pPr algn="l"/>
@@ -10566,7 +12559,7 @@
           </a:fontRef>
         </p:style>
         <p:txBody>
-          <a:bodyPr wrap="square" lIns="64008" tIns="27432" rIns="64008" bIns="27432" rtlCol="0" anchor="t"/>
+          <a:bodyPr rtlCol="0" anchor="t" wrap="square" lIns="64008" rIns="64008" tIns="27432" bIns="27432"/>
           <a:lstStyle/>
           <a:p>
             <a:pPr algn="l"/>
@@ -10595,7 +12588,7 @@
 </p:sld>
 </file>
 
-<file path=ppt/slides/slide4.xml><?xml version="1.0" encoding="utf-8"?>
+<file path=ppt/slides/slide5.xml><?xml version="1.0" encoding="utf-8"?>
 <p:sld xmlns:a="http://schemas.openxmlformats.org/drawingml/2006/main" xmlns:r="http://schemas.openxmlformats.org/officeDocument/2006/relationships" xmlns:p="http://schemas.openxmlformats.org/presentationml/2006/main">
   <p:cSld>
     <p:spTree>
@@ -10782,7 +12775,7 @@
                 <a:tabLst/>
                 <a:defRPr/>
               </a:pPr>
-              <a:t>4</a:t>
+              <a:t>5</a:t>
             </a:fld>
             <a:endParaRPr kumimoji="0" lang="en-US" sz="1200" b="1" i="0" u="none" strike="noStrike" kern="1200" cap="none" spc="0" normalizeH="0" baseline="0" noProof="0" dirty="0">
               <a:ln>
@@ -10838,6 +12831,23 @@
               <a:tabLst/>
               <a:defRPr/>
             </a:pPr>
+            <a:r>
+              <a:rPr kumimoji="0" lang="en-US" sz="1200" b="0" i="0" u="none" strike="noStrike" kern="1200" cap="none" spc="0" normalizeH="0" baseline="0" noProof="0">
+                <a:ln>
+                  <a:noFill/>
+                </a:ln>
+                <a:solidFill>
+                  <a:prstClr val="white"/>
+                </a:solidFill>
+                <a:effectLst/>
+                <a:uLnTx/>
+                <a:uFillTx/>
+                <a:latin typeface="TradeGothic"/>
+                <a:ea typeface="+mn-ea"/>
+                <a:cs typeface="+mn-cs"/>
+              </a:rPr>
+              <a:t>@SIH Idea submission- Template</a:t>
+            </a:r>
             <a:endParaRPr kumimoji="0" lang="en-US" sz="1200" b="0" i="0" u="none" strike="noStrike" kern="1200" cap="none" spc="0" normalizeH="0" baseline="0" noProof="0" dirty="0">
               <a:ln>
                 <a:noFill/>
@@ -10899,18 +12909,14 @@
           <a:p>
             <a:pPr algn="ctr"/>
             <a:r>
-              <a:rPr lang="en-US" sz="1100" b="1" dirty="0" err="1">
+              <a:rPr lang="en-US" dirty="0" sz="1500" b="1">
                 <a:solidFill>
                   <a:srgbClr val="1F497D"/>
                 </a:solidFill>
               </a:rPr>
-              <a:t>CodeBloom</a:t>
-            </a:r>
-            <a:endParaRPr lang="en-US" sz="1100" b="1" dirty="0">
-              <a:solidFill>
-                <a:srgbClr val="1F497D"/>
-              </a:solidFill>
-            </a:endParaRPr>
+              <a:t>TrishulX</a:t>
+            </a:r>
+            <a:endParaRPr lang="en-IN" dirty="0"/>
           </a:p>
         </p:txBody>
       </p:sp>
@@ -10983,7 +12989,7 @@
           </a:fontRef>
         </p:style>
         <p:txBody>
-          <a:bodyPr wrap="square" lIns="45720" tIns="27432" rIns="45720" bIns="27432" rtlCol="0" anchor="ctr"/>
+          <a:bodyPr rtlCol="0" anchor="ctr" wrap="square" lIns="45720" rIns="45720" tIns="27432" bIns="27432"/>
           <a:lstStyle/>
           <a:p>
             <a:pPr algn="ctr"/>
@@ -11050,7 +13056,7 @@
           </a:fontRef>
         </p:style>
         <p:txBody>
-          <a:bodyPr wrap="square" lIns="45720" tIns="27432" rIns="45720" bIns="27432" rtlCol="0" anchor="ctr"/>
+          <a:bodyPr rtlCol="0" anchor="ctr" wrap="square" lIns="45720" rIns="45720" tIns="27432" bIns="27432"/>
           <a:lstStyle/>
           <a:p>
             <a:pPr algn="ctr"/>
@@ -11117,7 +13123,7 @@
           </a:fontRef>
         </p:style>
         <p:txBody>
-          <a:bodyPr wrap="square" lIns="45720" tIns="27432" rIns="45720" bIns="27432" rtlCol="0" anchor="ctr"/>
+          <a:bodyPr rtlCol="0" anchor="ctr" wrap="square" lIns="45720" rIns="45720" tIns="27432" bIns="27432"/>
           <a:lstStyle/>
           <a:p>
             <a:pPr algn="ctr"/>
@@ -11184,7 +13190,7 @@
           </a:fontRef>
         </p:style>
         <p:txBody>
-          <a:bodyPr wrap="square" lIns="45720" tIns="27432" rIns="45720" bIns="27432" rtlCol="0" anchor="ctr"/>
+          <a:bodyPr rtlCol="0" anchor="ctr" wrap="square" lIns="45720" rIns="45720" tIns="27432" bIns="27432"/>
           <a:lstStyle/>
           <a:p>
             <a:pPr algn="ctr"/>
@@ -11229,7 +13235,7 @@
           <a:noFill/>
         </p:spPr>
         <p:txBody>
-          <a:bodyPr wrap="square" lIns="36576" tIns="18288" rIns="36576" bIns="18288" anchor="ctr">
+          <a:bodyPr wrap="square" lIns="36576" rIns="36576" tIns="18288" bIns="18288" anchor="ctr">
             <a:spAutoFit/>
           </a:bodyPr>
           <a:lstStyle/>
@@ -11293,7 +13299,7 @@
           </a:fontRef>
         </p:style>
         <p:txBody>
-          <a:bodyPr wrap="square" lIns="0" tIns="27432" rIns="0" bIns="27432" rtlCol="0" anchor="ctr"/>
+          <a:bodyPr rtlCol="0" anchor="ctr" wrap="square" lIns="0" rIns="0" tIns="27432" bIns="27432"/>
           <a:lstStyle/>
           <a:p>
             <a:pPr algn="ctr"/>
@@ -11326,7 +13332,7 @@
           <a:noFill/>
         </p:spPr>
         <p:txBody>
-          <a:bodyPr wrap="square" lIns="36576" tIns="18288" rIns="36576" bIns="18288" anchor="ctr">
+          <a:bodyPr wrap="square" lIns="36576" rIns="36576" tIns="18288" bIns="18288" anchor="ctr">
             <a:spAutoFit/>
           </a:bodyPr>
           <a:lstStyle/>
@@ -11393,7 +13399,7 @@
           </a:fontRef>
         </p:style>
         <p:txBody>
-          <a:bodyPr wrap="square" lIns="0" tIns="27432" rIns="0" bIns="27432" rtlCol="0" anchor="ctr"/>
+          <a:bodyPr rtlCol="0" anchor="ctr" wrap="square" lIns="0" rIns="0" tIns="27432" bIns="27432"/>
           <a:lstStyle/>
           <a:p>
             <a:pPr algn="ctr"/>
@@ -11426,7 +13432,7 @@
           <a:noFill/>
         </p:spPr>
         <p:txBody>
-          <a:bodyPr wrap="square" lIns="36576" tIns="18288" rIns="36576" bIns="18288" anchor="ctr">
+          <a:bodyPr wrap="square" lIns="36576" rIns="36576" tIns="18288" bIns="18288" anchor="ctr">
             <a:spAutoFit/>
           </a:bodyPr>
           <a:lstStyle/>
@@ -11493,7 +13499,7 @@
           </a:fontRef>
         </p:style>
         <p:txBody>
-          <a:bodyPr wrap="square" lIns="0" tIns="27432" rIns="0" bIns="27432" rtlCol="0" anchor="ctr"/>
+          <a:bodyPr rtlCol="0" anchor="ctr" wrap="square" lIns="0" rIns="0" tIns="27432" bIns="27432"/>
           <a:lstStyle/>
           <a:p>
             <a:pPr algn="ctr"/>
@@ -11526,7 +13532,7 @@
           <a:noFill/>
         </p:spPr>
         <p:txBody>
-          <a:bodyPr wrap="square" lIns="36576" tIns="18288" rIns="36576" bIns="18288" anchor="ctr">
+          <a:bodyPr wrap="square" lIns="36576" rIns="36576" tIns="18288" bIns="18288" anchor="ctr">
             <a:spAutoFit/>
           </a:bodyPr>
           <a:lstStyle/>
@@ -11593,7 +13599,7 @@
           </a:fontRef>
         </p:style>
         <p:txBody>
-          <a:bodyPr wrap="square" lIns="0" tIns="27432" rIns="0" bIns="27432" rtlCol="0" anchor="ctr"/>
+          <a:bodyPr rtlCol="0" anchor="ctr" wrap="square" lIns="0" rIns="0" tIns="27432" bIns="27432"/>
           <a:lstStyle/>
           <a:p>
             <a:pPr algn="ctr"/>
@@ -11626,7 +13632,7 @@
           <a:noFill/>
         </p:spPr>
         <p:txBody>
-          <a:bodyPr wrap="square" lIns="36576" tIns="18288" rIns="36576" bIns="18288" anchor="ctr">
+          <a:bodyPr wrap="square" lIns="36576" rIns="36576" tIns="18288" bIns="18288" anchor="ctr">
             <a:spAutoFit/>
           </a:bodyPr>
           <a:lstStyle/>
@@ -11693,7 +13699,7 @@
           </a:fontRef>
         </p:style>
         <p:txBody>
-          <a:bodyPr wrap="square" lIns="0" tIns="27432" rIns="0" bIns="27432" rtlCol="0" anchor="ctr"/>
+          <a:bodyPr rtlCol="0" anchor="ctr" wrap="square" lIns="0" rIns="0" tIns="27432" bIns="27432"/>
           <a:lstStyle/>
           <a:p>
             <a:pPr algn="ctr"/>
@@ -11726,7 +13732,7 @@
           <a:noFill/>
         </p:spPr>
         <p:txBody>
-          <a:bodyPr wrap="square" lIns="36576" tIns="18288" rIns="36576" bIns="18288" anchor="ctr">
+          <a:bodyPr wrap="square" lIns="36576" rIns="36576" tIns="18288" bIns="18288" anchor="ctr">
             <a:spAutoFit/>
           </a:bodyPr>
           <a:lstStyle/>
@@ -11773,7 +13779,7 @@
           <a:noFill/>
         </p:spPr>
         <p:txBody>
-          <a:bodyPr wrap="square" lIns="36576" tIns="18288" rIns="36576" bIns="18288" anchor="t">
+          <a:bodyPr wrap="square" lIns="36576" rIns="36576" tIns="18288" bIns="18288" anchor="t">
             <a:spAutoFit/>
           </a:bodyPr>
           <a:lstStyle/>
@@ -11808,7 +13814,7 @@
           <a:noFill/>
         </p:spPr>
         <p:txBody>
-          <a:bodyPr wrap="square" lIns="36576" tIns="18288" rIns="36576" bIns="18288" anchor="t">
+          <a:bodyPr wrap="square" lIns="36576" rIns="36576" tIns="18288" bIns="18288" anchor="t">
             <a:spAutoFit/>
           </a:bodyPr>
           <a:lstStyle/>
@@ -11840,7 +13846,7 @@
         </p:xfrm>
         <a:graphic>
           <a:graphicData uri="http://schemas.openxmlformats.org/drawingml/2006/chart">
-            <c:chart xmlns:c="http://schemas.openxmlformats.org/drawingml/2006/chart" xmlns:r="http://schemas.openxmlformats.org/officeDocument/2006/relationships" r:id="rId4"/>
+            <c:chart xmlns:c="http://schemas.openxmlformats.org/drawingml/2006/chart" r:id="rId4"/>
           </a:graphicData>
         </a:graphic>
       </p:graphicFrame>
@@ -11861,7 +13867,7 @@
           <a:noFill/>
         </p:spPr>
         <p:txBody>
-          <a:bodyPr wrap="square" lIns="36576" tIns="18288" rIns="36576" bIns="18288" anchor="ctr">
+          <a:bodyPr wrap="square" lIns="36576" rIns="36576" tIns="18288" bIns="18288" anchor="ctr">
             <a:spAutoFit/>
           </a:bodyPr>
           <a:lstStyle/>
@@ -11927,11 +13933,10 @@
           </a:fontRef>
         </p:style>
         <p:txBody>
-          <a:bodyPr wrap="square" lIns="54864" tIns="27432" rIns="54864" bIns="27432" rtlCol="0" anchor="ctr"/>
+          <a:bodyPr rtlCol="0" anchor="ctr" wrap="square" lIns="54864" rIns="54864" tIns="27432" bIns="27432"/>
           <a:lstStyle/>
           <a:p>
             <a:pPr algn="ctr"/>
-            <a:endParaRPr/>
           </a:p>
         </p:txBody>
       </p:sp>
@@ -11972,7 +13977,7 @@
           </a:fontRef>
         </p:style>
         <p:txBody>
-          <a:bodyPr wrap="square" lIns="18288" tIns="27432" rIns="18288" bIns="27432" rtlCol="0" anchor="ctr"/>
+          <a:bodyPr rtlCol="0" anchor="ctr" wrap="square" lIns="18288" rIns="18288" tIns="27432" bIns="27432"/>
           <a:lstStyle/>
           <a:p>
             <a:pPr algn="ctr"/>
@@ -12005,12 +14010,12 @@
           <a:noFill/>
         </p:spPr>
         <p:txBody>
-          <a:bodyPr wrap="square" lIns="36576" tIns="18288" rIns="36576" bIns="18288" anchor="t">
+          <a:bodyPr wrap="square" lIns="36576" rIns="36576" tIns="18288" bIns="18288" anchor="t">
             <a:spAutoFit/>
           </a:bodyPr>
           <a:lstStyle/>
           <a:p>
-            <a:pPr marL="146304" indent="-146304" algn="l">
+            <a:pPr algn="l" marL="146304" indent="-146304">
               <a:spcAft>
                 <a:spcPts val="200"/>
               </a:spcAft>
@@ -12031,7 +14036,7 @@
             </a:r>
           </a:p>
           <a:p>
-            <a:pPr marL="146304" indent="-146304" algn="l">
+            <a:pPr algn="l" marL="146304" indent="-146304">
               <a:spcAft>
                 <a:spcPts val="200"/>
               </a:spcAft>
@@ -12052,7 +14057,7 @@
             </a:r>
           </a:p>
           <a:p>
-            <a:pPr marL="146304" indent="-146304" algn="l">
+            <a:pPr algn="l" marL="146304" indent="-146304">
               <a:spcAft>
                 <a:spcPts val="200"/>
               </a:spcAft>
@@ -12113,11 +14118,10 @@
           </a:fontRef>
         </p:style>
         <p:txBody>
-          <a:bodyPr wrap="square" lIns="54864" tIns="27432" rIns="54864" bIns="27432" rtlCol="0" anchor="ctr"/>
+          <a:bodyPr rtlCol="0" anchor="ctr" wrap="square" lIns="54864" rIns="54864" tIns="27432" bIns="27432"/>
           <a:lstStyle/>
           <a:p>
             <a:pPr algn="ctr"/>
-            <a:endParaRPr/>
           </a:p>
         </p:txBody>
       </p:sp>
@@ -12158,7 +14162,7 @@
           </a:fontRef>
         </p:style>
         <p:txBody>
-          <a:bodyPr wrap="square" lIns="18288" tIns="27432" rIns="18288" bIns="27432" rtlCol="0" anchor="ctr"/>
+          <a:bodyPr rtlCol="0" anchor="ctr" wrap="square" lIns="18288" rIns="18288" tIns="27432" bIns="27432"/>
           <a:lstStyle/>
           <a:p>
             <a:pPr algn="ctr"/>
@@ -12191,12 +14195,12 @@
           <a:noFill/>
         </p:spPr>
         <p:txBody>
-          <a:bodyPr wrap="square" lIns="36576" tIns="18288" rIns="36576" bIns="18288" anchor="t">
+          <a:bodyPr wrap="square" lIns="36576" rIns="36576" tIns="18288" bIns="18288" anchor="t">
             <a:spAutoFit/>
           </a:bodyPr>
           <a:lstStyle/>
           <a:p>
-            <a:pPr marL="146304" indent="-146304" algn="l">
+            <a:pPr algn="l" marL="146304" indent="-146304">
               <a:spcAft>
                 <a:spcPts val="200"/>
               </a:spcAft>
@@ -12217,7 +14221,7 @@
             </a:r>
           </a:p>
           <a:p>
-            <a:pPr marL="146304" indent="-146304" algn="l">
+            <a:pPr algn="l" marL="146304" indent="-146304">
               <a:spcAft>
                 <a:spcPts val="200"/>
               </a:spcAft>
@@ -12238,7 +14242,7 @@
             </a:r>
           </a:p>
           <a:p>
-            <a:pPr marL="146304" indent="-146304" algn="l">
+            <a:pPr algn="l" marL="146304" indent="-146304">
               <a:spcAft>
                 <a:spcPts val="200"/>
               </a:spcAft>
@@ -12299,11 +14303,10 @@
           </a:fontRef>
         </p:style>
         <p:txBody>
-          <a:bodyPr wrap="square" lIns="54864" tIns="27432" rIns="54864" bIns="27432" rtlCol="0" anchor="ctr"/>
+          <a:bodyPr rtlCol="0" anchor="ctr" wrap="square" lIns="54864" rIns="54864" tIns="27432" bIns="27432"/>
           <a:lstStyle/>
           <a:p>
             <a:pPr algn="ctr"/>
-            <a:endParaRPr/>
           </a:p>
         </p:txBody>
       </p:sp>
@@ -12344,7 +14347,7 @@
           </a:fontRef>
         </p:style>
         <p:txBody>
-          <a:bodyPr wrap="square" lIns="18288" tIns="27432" rIns="18288" bIns="27432" rtlCol="0" anchor="ctr"/>
+          <a:bodyPr rtlCol="0" anchor="ctr" wrap="square" lIns="18288" rIns="18288" tIns="27432" bIns="27432"/>
           <a:lstStyle/>
           <a:p>
             <a:pPr algn="ctr"/>
@@ -12377,12 +14380,12 @@
           <a:noFill/>
         </p:spPr>
         <p:txBody>
-          <a:bodyPr wrap="square" lIns="36576" tIns="18288" rIns="36576" bIns="18288" anchor="t">
+          <a:bodyPr wrap="square" lIns="36576" rIns="36576" tIns="18288" bIns="18288" anchor="t">
             <a:spAutoFit/>
           </a:bodyPr>
           <a:lstStyle/>
           <a:p>
-            <a:pPr marL="146304" indent="-146304" algn="l">
+            <a:pPr algn="l" marL="146304" indent="-146304">
               <a:spcAft>
                 <a:spcPts val="200"/>
               </a:spcAft>
@@ -12403,7 +14406,7 @@
             </a:r>
           </a:p>
           <a:p>
-            <a:pPr marL="146304" indent="-146304" algn="l">
+            <a:pPr algn="l" marL="146304" indent="-146304">
               <a:spcAft>
                 <a:spcPts val="200"/>
               </a:spcAft>
@@ -12442,7 +14445,7 @@
           <a:noFill/>
         </p:spPr>
         <p:txBody>
-          <a:bodyPr wrap="square" lIns="36576" tIns="18288" rIns="36576" bIns="18288" anchor="t">
+          <a:bodyPr wrap="square" lIns="36576" rIns="36576" tIns="18288" bIns="18288" anchor="t">
             <a:spAutoFit/>
           </a:bodyPr>
           <a:lstStyle/>
@@ -12473,7 +14476,7 @@
 </p:sld>
 </file>
 
-<file path=ppt/slides/slide5.xml><?xml version="1.0" encoding="utf-8"?>
+<file path=ppt/slides/slide6.xml><?xml version="1.0" encoding="utf-8"?>
 <p:sld xmlns:a="http://schemas.openxmlformats.org/drawingml/2006/main" xmlns:r="http://schemas.openxmlformats.org/officeDocument/2006/relationships" xmlns:p="http://schemas.openxmlformats.org/presentationml/2006/main">
   <p:cSld>
     <p:spTree>
@@ -12660,7 +14663,7 @@
                 <a:tabLst/>
                 <a:defRPr/>
               </a:pPr>
-              <a:t>5</a:t>
+              <a:t>6</a:t>
             </a:fld>
             <a:endParaRPr kumimoji="0" lang="en-US" sz="1200" b="1" i="0" u="none" strike="noStrike" kern="1200" cap="none" spc="0" normalizeH="0" baseline="0" noProof="0" dirty="0">
               <a:ln>
@@ -12716,6 +14719,23 @@
               <a:tabLst/>
               <a:defRPr/>
             </a:pPr>
+            <a:r>
+              <a:rPr kumimoji="0" lang="en-US" sz="1200" b="0" i="0" u="none" strike="noStrike" kern="1200" cap="none" spc="0" normalizeH="0" baseline="0" noProof="0">
+                <a:ln>
+                  <a:noFill/>
+                </a:ln>
+                <a:solidFill>
+                  <a:prstClr val="white"/>
+                </a:solidFill>
+                <a:effectLst/>
+                <a:uLnTx/>
+                <a:uFillTx/>
+                <a:latin typeface="TradeGothic"/>
+                <a:ea typeface="+mn-ea"/>
+                <a:cs typeface="+mn-cs"/>
+              </a:rPr>
+              <a:t>@SIH Idea submission- Template</a:t>
+            </a:r>
             <a:endParaRPr kumimoji="0" lang="en-US" sz="1200" b="0" i="0" u="none" strike="noStrike" kern="1200" cap="none" spc="0" normalizeH="0" baseline="0" noProof="0" dirty="0">
               <a:ln>
                 <a:noFill/>
@@ -12777,10 +14797,14 @@
           <a:p>
             <a:pPr algn="ctr"/>
             <a:r>
-              <a:rPr lang="en-US" sz="1100" b="1" dirty="0" err="1"/>
-              <a:t>CodeBloom</a:t>
-            </a:r>
-            <a:endParaRPr lang="en-IN" sz="1100" b="1" dirty="0"/>
+              <a:rPr lang="en-US" dirty="0" sz="1500" b="1">
+                <a:solidFill>
+                  <a:srgbClr val="1F497D"/>
+                </a:solidFill>
+              </a:rPr>
+              <a:t>TrishulX</a:t>
+            </a:r>
+            <a:endParaRPr lang="en-IN" dirty="0"/>
           </a:p>
         </p:txBody>
       </p:sp>
@@ -12831,7 +14855,7 @@
           <a:noFill/>
         </p:spPr>
         <p:txBody>
-          <a:bodyPr wrap="square" lIns="36576" tIns="18288" rIns="36576" bIns="18288" anchor="ctr">
+          <a:bodyPr wrap="square" lIns="36576" rIns="36576" tIns="18288" bIns="18288" anchor="ctr">
             <a:spAutoFit/>
           </a:bodyPr>
           <a:lstStyle/>
@@ -12877,34 +14901,10 @@
                 <a:tableStyleId>{5C22544A-7EE6-4342-B048-85BDC9FD1C3A}</a:tableStyleId>
               </a:tblPr>
               <a:tblGrid>
-                <a:gridCol w="365760">
-                  <a:extLst>
-                    <a:ext uri="{9D8B030D-6E8A-4147-A177-3AD203B41FA5}">
-                      <a16:colId xmlns:a16="http://schemas.microsoft.com/office/drawing/2014/main" val="20000"/>
-                    </a:ext>
-                  </a:extLst>
-                </a:gridCol>
-                <a:gridCol w="5120640">
-                  <a:extLst>
-                    <a:ext uri="{9D8B030D-6E8A-4147-A177-3AD203B41FA5}">
-                      <a16:colId xmlns:a16="http://schemas.microsoft.com/office/drawing/2014/main" val="20001"/>
-                    </a:ext>
-                  </a:extLst>
-                </a:gridCol>
-                <a:gridCol w="2880360">
-                  <a:extLst>
-                    <a:ext uri="{9D8B030D-6E8A-4147-A177-3AD203B41FA5}">
-                      <a16:colId xmlns:a16="http://schemas.microsoft.com/office/drawing/2014/main" val="20002"/>
-                    </a:ext>
-                  </a:extLst>
-                </a:gridCol>
-                <a:gridCol w="3090672">
-                  <a:extLst>
-                    <a:ext uri="{9D8B030D-6E8A-4147-A177-3AD203B41FA5}">
-                      <a16:colId xmlns:a16="http://schemas.microsoft.com/office/drawing/2014/main" val="20003"/>
-                    </a:ext>
-                  </a:extLst>
-                </a:gridCol>
+                <a:gridCol w="365760"/>
+                <a:gridCol w="5120640"/>
+                <a:gridCol w="2880360"/>
+                <a:gridCol w="3090672"/>
               </a:tblGrid>
               <a:tr h="310896">
                 <a:tc>
@@ -12999,11 +14999,6 @@
                     </a:solidFill>
                   </a:tcPr>
                 </a:tc>
-                <a:extLst>
-                  <a:ext uri="{0D108BD9-81ED-4DB2-BD59-A6C34878D82A}">
-                    <a16:rowId xmlns:a16="http://schemas.microsoft.com/office/drawing/2014/main" val="10000"/>
-                  </a:ext>
-                </a:extLst>
               </a:tr>
               <a:tr h="429768">
                 <a:tc>
@@ -13099,11 +15094,6 @@
                     </a:solidFill>
                   </a:tcPr>
                 </a:tc>
-                <a:extLst>
-                  <a:ext uri="{0D108BD9-81ED-4DB2-BD59-A6C34878D82A}">
-                    <a16:rowId xmlns:a16="http://schemas.microsoft.com/office/drawing/2014/main" val="10001"/>
-                  </a:ext>
-                </a:extLst>
               </a:tr>
               <a:tr h="429768">
                 <a:tc>
@@ -13199,11 +15189,6 @@
                     </a:solidFill>
                   </a:tcPr>
                 </a:tc>
-                <a:extLst>
-                  <a:ext uri="{0D108BD9-81ED-4DB2-BD59-A6C34878D82A}">
-                    <a16:rowId xmlns:a16="http://schemas.microsoft.com/office/drawing/2014/main" val="10002"/>
-                  </a:ext>
-                </a:extLst>
               </a:tr>
               <a:tr h="429768">
                 <a:tc>
@@ -13299,11 +15284,6 @@
                     </a:solidFill>
                   </a:tcPr>
                 </a:tc>
-                <a:extLst>
-                  <a:ext uri="{0D108BD9-81ED-4DB2-BD59-A6C34878D82A}">
-                    <a16:rowId xmlns:a16="http://schemas.microsoft.com/office/drawing/2014/main" val="10003"/>
-                  </a:ext>
-                </a:extLst>
               </a:tr>
               <a:tr h="429768">
                 <a:tc>
@@ -13399,11 +15379,6 @@
                     </a:solidFill>
                   </a:tcPr>
                 </a:tc>
-                <a:extLst>
-                  <a:ext uri="{0D108BD9-81ED-4DB2-BD59-A6C34878D82A}">
-                    <a16:rowId xmlns:a16="http://schemas.microsoft.com/office/drawing/2014/main" val="10004"/>
-                  </a:ext>
-                </a:extLst>
               </a:tr>
               <a:tr h="429768">
                 <a:tc>
@@ -13499,11 +15474,6 @@
                     </a:solidFill>
                   </a:tcPr>
                 </a:tc>
-                <a:extLst>
-                  <a:ext uri="{0D108BD9-81ED-4DB2-BD59-A6C34878D82A}">
-                    <a16:rowId xmlns:a16="http://schemas.microsoft.com/office/drawing/2014/main" val="10005"/>
-                  </a:ext>
-                </a:extLst>
               </a:tr>
               <a:tr h="429768">
                 <a:tc>
@@ -13599,11 +15569,6 @@
                     </a:solidFill>
                   </a:tcPr>
                 </a:tc>
-                <a:extLst>
-                  <a:ext uri="{0D108BD9-81ED-4DB2-BD59-A6C34878D82A}">
-                    <a16:rowId xmlns:a16="http://schemas.microsoft.com/office/drawing/2014/main" val="10006"/>
-                  </a:ext>
-                </a:extLst>
               </a:tr>
               <a:tr h="429768">
                 <a:tc>
@@ -13699,11 +15664,6 @@
                     </a:solidFill>
                   </a:tcPr>
                 </a:tc>
-                <a:extLst>
-                  <a:ext uri="{0D108BD9-81ED-4DB2-BD59-A6C34878D82A}">
-                    <a16:rowId xmlns:a16="http://schemas.microsoft.com/office/drawing/2014/main" val="10007"/>
-                  </a:ext>
-                </a:extLst>
               </a:tr>
               <a:tr h="429768">
                 <a:tc>
@@ -13799,11 +15759,6 @@
                     </a:solidFill>
                   </a:tcPr>
                 </a:tc>
-                <a:extLst>
-                  <a:ext uri="{0D108BD9-81ED-4DB2-BD59-A6C34878D82A}">
-                    <a16:rowId xmlns:a16="http://schemas.microsoft.com/office/drawing/2014/main" val="10008"/>
-                  </a:ext>
-                </a:extLst>
               </a:tr>
               <a:tr h="429768">
                 <a:tc>
@@ -13899,11 +15854,6 @@
                     </a:solidFill>
                   </a:tcPr>
                 </a:tc>
-                <a:extLst>
-                  <a:ext uri="{0D108BD9-81ED-4DB2-BD59-A6C34878D82A}">
-                    <a16:rowId xmlns:a16="http://schemas.microsoft.com/office/drawing/2014/main" val="10009"/>
-                  </a:ext>
-                </a:extLst>
               </a:tr>
             </a:tbl>
           </a:graphicData>
@@ -13926,7 +15876,7 @@
           <a:noFill/>
         </p:spPr>
         <p:txBody>
-          <a:bodyPr wrap="square" lIns="36576" tIns="18288" rIns="36576" bIns="18288" anchor="t">
+          <a:bodyPr wrap="square" lIns="36576" rIns="36576" tIns="18288" bIns="18288" anchor="t">
             <a:spAutoFit/>
           </a:bodyPr>
           <a:lstStyle/>
